--- a/slides/module8.pptx
+++ b/slides/module8.pptx
@@ -443,7 +443,7 @@
           <a:lstStyle/>
           <a:p>
             <a:r>
-              <a:t>The warm-up is the Module 4 recipe flown for real: raise apogee, coast, circularize. The second burn surprises students — you crawl into apogee at 1.6 kilometers per second and must nearly double your speed. At 3,860 of 4,000 meters per second, sloppy thruster work fails the mission; victory is holding station near the target for a full orbit, not touching it.</a:t>
+              <a:t>The warm-up is the Module 4 recipe flown for real: raise apogee, coast, circularize. The second burn surprises students — you crawl into apogee at 1.6 kilometers per second and must nearly double your speed. At 3,860 of 4,400 meters per second, sloppy thruster work fails the mission; victory is holding station near the target for a full orbit, not touching it.</a:t>
             </a:r>
           </a:p>
         </p:txBody>
@@ -583,7 +583,7 @@
           <a:lstStyle/>
           <a:p>
             <a:r>
-              <a:t>Lunar orbit insertion is the counter-intuitive finale: after days of speeding up and coasting, the arrival burn is a retrograde brake. The Moon's gravity is too weak to capture a spacecraft at flyby speed — shed about 900 meters per second at closest approach or slingshot past. The full mission budget is 4,200; the logbook shows whether the plan ever fit.</a:t>
+              <a:t>Lunar orbit insertion is the counter-intuitive finale: after days of speeding up and coasting, the arrival burn is a retrograde brake. The Moon's gravity is too weak to capture a spacecraft at flyby speed — shed about 900 meters per second at closest approach or slingshot past. The full mission budget is 4,600; the logbook shows whether the plan ever fit.</a:t>
             </a:r>
           </a:p>
         </p:txBody>
@@ -5164,7 +5164,7 @@
                 </a:solidFill>
                 <a:latin typeface="Arial"/>
               </a:rPr>
-              <a:t>3,860 / 4,000</a:t>
+              <a:t>3,860 / 4,400</a:t>
             </a:r>
           </a:p>
           <a:p>
@@ -6174,7 +6174,7 @@
                 </a:solidFill>
                 <a:latin typeface="Arial"/>
               </a:rPr>
-              <a:t>4,200 m/s</a:t>
+              <a:t>4,600 m/s</a:t>
             </a:r>
           </a:p>
           <a:p>

--- a/slides/module8.pptx
+++ b/slides/module8.pptx
@@ -443,7 +443,7 @@
           <a:lstStyle/>
           <a:p>
             <a:r>
-              <a:t>The warm-up is the Module 4 recipe flown for real: raise apogee, coast, circularize. The second burn surprises students — you crawl into apogee at 1.6 kilometers per second and must nearly double your speed. At 3,860 of 4,400 meters per second, sloppy thruster work fails the mission; victory is holding station near the target for a full orbit, not touching it.</a:t>
+              <a:t>The warm-up is the Module 4 recipe flown for real: raise apogee, coast, circularize. The second burn surprises students — you crawl into apogee at 1.6 kilometers per second and must nearly double your speed. At 3,860 of 4,800 meters per second, sloppy thruster work fails the mission; victory is holding station near the target for a full orbit, not touching it.</a:t>
             </a:r>
           </a:p>
         </p:txBody>
@@ -583,7 +583,7 @@
           <a:lstStyle/>
           <a:p>
             <a:r>
-              <a:t>Lunar orbit insertion is the counter-intuitive finale: after days of speeding up and coasting, the arrival burn is a retrograde brake. The Moon's gravity is too weak to capture a spacecraft at flyby speed — shed about 900 meters per second at closest approach or slingshot past. The full mission budget is 4,600; the logbook shows whether the plan ever fit.</a:t>
+              <a:t>Lunar orbit insertion is the counter-intuitive finale: after days of speeding up and coasting, the arrival burn is a retrograde brake. The Moon's gravity is too weak to capture a spacecraft at flyby speed — shed about 900 meters per second at closest approach or slingshot past. The full mission budget is 5,000; the logbook shows whether the plan ever fit.</a:t>
             </a:r>
           </a:p>
         </p:txBody>
@@ -4583,7 +4583,7 @@
                 </a:solidFill>
                 <a:latin typeface="Arial"/>
               </a:rPr>
-              <a:t>unlocked by a clean GEO run: lead a moving target across 384,400 km.</a:t>
+              <a:t>unlocked by a clean GEO run: lead a moving target across 384,800 km.</a:t>
             </a:r>
           </a:p>
         </p:txBody>
@@ -5164,7 +5164,7 @@
                 </a:solidFill>
                 <a:latin typeface="Arial"/>
               </a:rPr>
-              <a:t>3,860 / 4,400</a:t>
+              <a:t>3,860 / 4,800</a:t>
             </a:r>
           </a:p>
           <a:p>
@@ -6174,7 +6174,7 @@
                 </a:solidFill>
                 <a:latin typeface="Arial"/>
               </a:rPr>
-              <a:t>4,600 m/s</a:t>
+              <a:t>5,000 m/s</a:t>
             </a:r>
           </a:p>
           <a:p>

--- a/slides/module8.pptx
+++ b/slides/module8.pptx
@@ -513,7 +513,7 @@
           <a:lstStyle/>
           <a:p>
             <a:r>
-              <a:t>Trans-lunar injection is the duck-hunter shot from Module 5 flown with real stakes: the Moon moves roughly 120 degrees during the four-day coast, so you burn toward empty space. Aim the apogee just past the Moon's orbit — about 395,000 kilometers — because a dead-center aim is a collision course. Then you wait, watching the geometry close.</a:t>
+              <a:t>Trans-lunar injection is the duck-hunter shot from Module 5 flown with real stakes: the Moon moves roughly 120 degrees during the four-day coast, so you burn toward empty space. Aim the apogee just past the Moon's orbit — about 397,500 kilometers — because a dead-center aim is a collision course. Then you wait, watching the geometry close.</a:t>
             </a:r>
           </a:p>
         </p:txBody>
@@ -583,7 +583,7 @@
           <a:lstStyle/>
           <a:p>
             <a:r>
-              <a:t>Lunar orbit insertion is the counter-intuitive finale: after days of speeding up and coasting, the arrival burn is a retrograde brake. The Moon's gravity is too weak to capture a spacecraft at flyby speed — shed about 900 meters per second at closest approach or slingshot past. The full mission budget is 5,000; the logbook shows whether the plan ever fit.</a:t>
+              <a:t>Lunar orbit insertion is the counter-intuitive finale: after days of speeding up and coasting, the arrival burn is a retrograde brake. The Moon's gravity is too weak to capture a spacecraft at flyby speed — shed about 900 meters per second at closest approach or slingshot past. The full mission budget is 7,500; the logbook shows whether the plan ever fit.</a:t>
             </a:r>
           </a:p>
         </p:txBody>
@@ -5739,7 +5739,7 @@
                 </a:solidFill>
                 <a:latin typeface="Arial"/>
               </a:rPr>
-              <a:t>Aim for ~395,000 km — dead-center on the Moon is a collision, not a capture.</a:t>
+              <a:t>Aim for ~397,500 km — dead-center on the Moon is a collision, not a capture.</a:t>
             </a:r>
           </a:p>
         </p:txBody>
@@ -6174,7 +6174,7 @@
                 </a:solidFill>
                 <a:latin typeface="Arial"/>
               </a:rPr>
-              <a:t>5,000 m/s</a:t>
+              <a:t>7,500 m/s</a:t>
             </a:r>
           </a:p>
           <a:p>

--- a/slides/module8.pptx
+++ b/slides/module8.pptx
@@ -6086,7 +6086,7 @@
                 </a:solidFill>
                 <a:latin typeface="Arial"/>
               </a:rPr>
-              <a:t>the capture burn — pointed BACKWARDS</a:t>
+              <a:t>the capture burn — pointed REVERSE</a:t>
             </a:r>
           </a:p>
         </p:txBody>

--- a/slides/module8.pptx
+++ b/slides/module8.pptx
@@ -10,10 +10,14 @@
   <p:sldIdLst>
     <p:sldId id="256" r:id="rId2"/>
     <p:sldId id="257" r:id="rId3"/>
+    <p:sldId id="265" r:id="rId16"/>
     <p:sldId id="258" r:id="rId4"/>
+    <p:sldId id="264" r:id="rId15"/>
     <p:sldId id="259" r:id="rId5"/>
     <p:sldId id="260" r:id="rId6"/>
+    <p:sldId id="266" r:id="rId17"/>
     <p:sldId id="261" r:id="rId7"/>
+    <p:sldId id="267" r:id="rId18"/>
     <p:sldId id="262" r:id="rId8"/>
     <p:sldId id="263" r:id="rId9"/>
   </p:sldIdLst>
@@ -4168,6 +4172,1683 @@
 </p:sld>
 </file>
 
+<file path=ppt/slides/slide10.xml><?xml version="1.0" encoding="utf-8"?>
+<p:sld xmlns:a="http://schemas.openxmlformats.org/drawingml/2006/main" xmlns:p="http://schemas.openxmlformats.org/presentationml/2006/main" xmlns:r="http://schemas.openxmlformats.org/officeDocument/2006/relationships">
+  <p:cSld>
+    <p:bg>
+      <p:bgPr>
+        <a:solidFill>
+          <a:srgbClr val="050A14"/>
+        </a:solidFill>
+        <a:effectLst/>
+      </p:bgPr>
+    </p:bg>
+    <p:spTree>
+      <p:nvGrpSpPr>
+        <p:cNvPr id="1" name=""/>
+        <p:cNvGrpSpPr/>
+        <p:nvPr/>
+      </p:nvGrpSpPr>
+      <p:grpSpPr/>
+      <p:sp>
+        <p:nvSpPr>
+          <p:cNvPr id="2" name="TextBox 1"/>
+          <p:cNvSpPr txBox="1"/>
+          <p:nvPr/>
+        </p:nvSpPr>
+        <p:spPr>
+          <a:xfrm>
+            <a:off x="548640" y="384048"/>
+            <a:ext cx="8686800" cy="292608"/>
+          </a:xfrm>
+          <a:prstGeom prst="rect">
+            <a:avLst/>
+          </a:prstGeom>
+          <a:noFill/>
+        </p:spPr>
+        <p:txBody>
+          <a:bodyPr wrap="square" lIns="0" tIns="0" rIns="0" bIns="0">
+            <a:spAutoFit/>
+          </a:bodyPr>
+          <a:lstStyle/>
+          <a:p>
+            <a:pPr algn="l"/>
+            <a:r>
+              <a:rPr sz="1100" b="1" i="0">
+                <a:solidFill>
+                  <a:srgbClr val="FFCF4D"/>
+                </a:solidFill>
+                <a:latin typeface="Arial"/>
+              </a:rPr>
+              <a:t>MODULE 8 · ORBIT ACADEMY</a:t>
+            </a:r>
+          </a:p>
+        </p:txBody>
+      </p:sp>
+      <p:sp>
+        <p:nvSpPr>
+          <p:cNvPr id="3" name="TextBox 2"/>
+          <p:cNvSpPr txBox="1"/>
+          <p:nvPr/>
+        </p:nvSpPr>
+        <p:spPr>
+          <a:xfrm>
+            <a:off x="548640" y="676656"/>
+            <a:ext cx="10058400" cy="640080"/>
+          </a:xfrm>
+          <a:prstGeom prst="rect">
+            <a:avLst/>
+          </a:prstGeom>
+          <a:noFill/>
+        </p:spPr>
+        <p:txBody>
+          <a:bodyPr wrap="square" lIns="0" tIns="0" rIns="0" bIns="0">
+            <a:spAutoFit/>
+          </a:bodyPr>
+          <a:lstStyle/>
+          <a:p>
+            <a:pPr algn="l"/>
+            <a:r>
+              <a:rPr sz="2700" b="1" i="0">
+                <a:solidFill>
+                  <a:srgbClr val="5FD0FF"/>
+                </a:solidFill>
+                <a:latin typeface="Arial"/>
+              </a:rPr>
+              <a:t>How you're scored</a:t>
+            </a:r>
+          </a:p>
+        </p:txBody>
+      </p:sp>
+      <p:sp>
+        <p:nvSpPr>
+          <p:cNvPr id="4" name="Oval 3"/>
+          <p:cNvSpPr/>
+          <p:nvPr/>
+        </p:nvSpPr>
+        <p:spPr>
+          <a:xfrm>
+            <a:off x="10835640" y="484632"/>
+            <a:ext cx="914400" cy="347472"/>
+          </a:xfrm>
+          <a:prstGeom prst="ellipse">
+            <a:avLst/>
+          </a:prstGeom>
+          <a:noFill/>
+          <a:ln w="12700">
+            <a:solidFill>
+              <a:srgbClr val="2A4A74"/>
+            </a:solidFill>
+          </a:ln>
+          <a:effectLst/>
+        </p:spPr>
+        <p:style>
+          <a:lnRef idx="1">
+            <a:schemeClr val="accent1"/>
+          </a:lnRef>
+          <a:fillRef idx="3">
+            <a:schemeClr val="accent1"/>
+          </a:fillRef>
+          <a:effectRef idx="2">
+            <a:schemeClr val="accent1"/>
+          </a:effectRef>
+          <a:fontRef idx="minor">
+            <a:schemeClr val="lt1"/>
+          </a:fontRef>
+        </p:style>
+        <p:txBody>
+          <a:bodyPr rtlCol="0" anchor="ctr"/>
+          <a:lstStyle/>
+          <a:p>
+            <a:pPr algn="ctr"/>
+            <a:endParaRPr/>
+          </a:p>
+        </p:txBody>
+      </p:sp>
+      <p:sp>
+        <p:nvSpPr>
+          <p:cNvPr id="5" name="Oval 4"/>
+          <p:cNvSpPr/>
+          <p:nvPr/>
+        </p:nvSpPr>
+        <p:spPr>
+          <a:xfrm>
+            <a:off x="11708892" y="617219"/>
+            <a:ext cx="82296" cy="82296"/>
+          </a:xfrm>
+          <a:prstGeom prst="ellipse">
+            <a:avLst/>
+          </a:prstGeom>
+          <a:solidFill>
+            <a:srgbClr val="FFCF4D"/>
+          </a:solidFill>
+          <a:ln>
+            <a:noFill/>
+          </a:ln>
+          <a:effectLst/>
+        </p:spPr>
+        <p:style>
+          <a:lnRef idx="1">
+            <a:schemeClr val="accent1"/>
+          </a:lnRef>
+          <a:fillRef idx="3">
+            <a:schemeClr val="accent1"/>
+          </a:fillRef>
+          <a:effectRef idx="2">
+            <a:schemeClr val="accent1"/>
+          </a:effectRef>
+          <a:fontRef idx="minor">
+            <a:schemeClr val="lt1"/>
+          </a:fontRef>
+        </p:style>
+        <p:txBody>
+          <a:bodyPr rtlCol="0" anchor="ctr"/>
+          <a:lstStyle/>
+          <a:p>
+            <a:pPr algn="ctr"/>
+            <a:endParaRPr/>
+          </a:p>
+        </p:txBody>
+      </p:sp>
+      <p:sp>
+        <p:nvSpPr>
+          <p:cNvPr id="6" name="Rounded Rectangle 5"/>
+          <p:cNvSpPr/>
+          <p:nvPr/>
+        </p:nvSpPr>
+        <p:spPr>
+          <a:xfrm>
+            <a:off x="495147" y="2148840"/>
+            <a:ext cx="3520440" cy="2148840"/>
+          </a:xfrm>
+          <a:prstGeom prst="roundRect">
+            <a:avLst>
+              <a:gd name="adj" fmla="val 7000"/>
+            </a:avLst>
+          </a:prstGeom>
+          <a:solidFill>
+            <a:srgbClr val="0A1830"/>
+          </a:solidFill>
+          <a:ln w="12700">
+            <a:solidFill>
+              <a:srgbClr val="1E3A5F"/>
+            </a:solidFill>
+          </a:ln>
+          <a:effectLst/>
+        </p:spPr>
+        <p:style>
+          <a:lnRef idx="1">
+            <a:schemeClr val="accent1"/>
+          </a:lnRef>
+          <a:fillRef idx="3">
+            <a:schemeClr val="accent1"/>
+          </a:fillRef>
+          <a:effectRef idx="2">
+            <a:schemeClr val="accent1"/>
+          </a:effectRef>
+          <a:fontRef idx="minor">
+            <a:schemeClr val="lt1"/>
+          </a:fontRef>
+        </p:style>
+        <p:txBody>
+          <a:bodyPr rtlCol="0" anchor="ctr"/>
+          <a:lstStyle/>
+          <a:p>
+            <a:pPr algn="ctr"/>
+            <a:endParaRPr/>
+          </a:p>
+        </p:txBody>
+      </p:sp>
+      <p:sp>
+        <p:nvSpPr>
+          <p:cNvPr id="7" name="TextBox 6"/>
+          <p:cNvSpPr txBox="1"/>
+          <p:nvPr/>
+        </p:nvSpPr>
+        <p:spPr>
+          <a:xfrm>
+            <a:off x="678027" y="2148840"/>
+            <a:ext cx="3154680" cy="2148840"/>
+          </a:xfrm>
+          <a:prstGeom prst="rect">
+            <a:avLst/>
+          </a:prstGeom>
+          <a:noFill/>
+        </p:spPr>
+        <p:txBody>
+          <a:bodyPr wrap="square" lIns="0" tIns="0" rIns="0" bIns="0" anchor="ctr">
+            <a:spAutoFit/>
+          </a:bodyPr>
+          <a:lstStyle/>
+          <a:p>
+            <a:pPr algn="ctr">
+              <a:spcAft>
+                <a:spcPts val="800"/>
+              </a:spcAft>
+            </a:pPr>
+            <a:r>
+              <a:rPr sz="3300" b="1" i="0">
+                <a:solidFill>
+                  <a:srgbClr val="FFCF4D"/>
+                </a:solidFill>
+                <a:latin typeface="Arial"/>
+              </a:rPr>
+              <a:t>GEO</a:t>
+            </a:r>
+          </a:p>
+          <a:p>
+            <a:pPr algn="ctr"/>
+            <a:r>
+              <a:rPr sz="1250" b="0" i="0">
+                <a:solidFill>
+                  <a:srgbClr val="CFE3FF"/>
+                </a:solidFill>
+                <a:latin typeface="Arial"/>
+              </a:rPr>
+              <a:t>5% radius · 4% speed · 3.5° of target — HELD</a:t>
+            </a:r>
+          </a:p>
+        </p:txBody>
+      </p:sp>
+      <p:sp>
+        <p:nvSpPr>
+          <p:cNvPr id="8" name="Rounded Rectangle 7"/>
+          <p:cNvSpPr/>
+          <p:nvPr/>
+        </p:nvSpPr>
+        <p:spPr>
+          <a:xfrm>
+            <a:off x="4335627" y="2148840"/>
+            <a:ext cx="3520440" cy="2148840"/>
+          </a:xfrm>
+          <a:prstGeom prst="roundRect">
+            <a:avLst>
+              <a:gd name="adj" fmla="val 7000"/>
+            </a:avLst>
+          </a:prstGeom>
+          <a:solidFill>
+            <a:srgbClr val="0A1830"/>
+          </a:solidFill>
+          <a:ln w="12700">
+            <a:solidFill>
+              <a:srgbClr val="1E3A5F"/>
+            </a:solidFill>
+          </a:ln>
+          <a:effectLst/>
+        </p:spPr>
+        <p:style>
+          <a:lnRef idx="1">
+            <a:schemeClr val="accent1"/>
+          </a:lnRef>
+          <a:fillRef idx="3">
+            <a:schemeClr val="accent1"/>
+          </a:fillRef>
+          <a:effectRef idx="2">
+            <a:schemeClr val="accent1"/>
+          </a:effectRef>
+          <a:fontRef idx="minor">
+            <a:schemeClr val="lt1"/>
+          </a:fontRef>
+        </p:style>
+        <p:txBody>
+          <a:bodyPr rtlCol="0" anchor="ctr"/>
+          <a:lstStyle/>
+          <a:p>
+            <a:pPr algn="ctr"/>
+            <a:endParaRPr/>
+          </a:p>
+        </p:txBody>
+      </p:sp>
+      <p:sp>
+        <p:nvSpPr>
+          <p:cNvPr id="9" name="TextBox 8"/>
+          <p:cNvSpPr txBox="1"/>
+          <p:nvPr/>
+        </p:nvSpPr>
+        <p:spPr>
+          <a:xfrm>
+            <a:off x="4518507" y="2148840"/>
+            <a:ext cx="3154680" cy="2148840"/>
+          </a:xfrm>
+          <a:prstGeom prst="rect">
+            <a:avLst/>
+          </a:prstGeom>
+          <a:noFill/>
+        </p:spPr>
+        <p:txBody>
+          <a:bodyPr wrap="square" lIns="0" tIns="0" rIns="0" bIns="0" anchor="ctr">
+            <a:spAutoFit/>
+          </a:bodyPr>
+          <a:lstStyle/>
+          <a:p>
+            <a:pPr algn="ctr">
+              <a:spcAft>
+                <a:spcPts val="800"/>
+              </a:spcAft>
+            </a:pPr>
+            <a:r>
+              <a:rPr sz="3300" b="1" i="0">
+                <a:solidFill>
+                  <a:srgbClr val="FFCF4D"/>
+                </a:solidFill>
+                <a:latin typeface="Arial"/>
+              </a:rPr>
+              <a:t>MOON</a:t>
+            </a:r>
+          </a:p>
+          <a:p>
+            <a:pPr algn="ctr"/>
+            <a:r>
+              <a:rPr sz="1250" b="0" i="0">
+                <a:solidFill>
+                  <a:srgbClr val="CFE3FF"/>
+                </a:solidFill>
+                <a:latin typeface="Arial"/>
+              </a:rPr>
+              <a:t>bound, inside the SOI, 8% of circular — HELD</a:t>
+            </a:r>
+          </a:p>
+        </p:txBody>
+      </p:sp>
+      <p:sp>
+        <p:nvSpPr>
+          <p:cNvPr id="10" name="Rounded Rectangle 9"/>
+          <p:cNvSpPr/>
+          <p:nvPr/>
+        </p:nvSpPr>
+        <p:spPr>
+          <a:xfrm>
+            <a:off x="8176107" y="2148840"/>
+            <a:ext cx="3520440" cy="2148840"/>
+          </a:xfrm>
+          <a:prstGeom prst="roundRect">
+            <a:avLst>
+              <a:gd name="adj" fmla="val 7000"/>
+            </a:avLst>
+          </a:prstGeom>
+          <a:solidFill>
+            <a:srgbClr val="0A1830"/>
+          </a:solidFill>
+          <a:ln w="12700">
+            <a:solidFill>
+              <a:srgbClr val="1E3A5F"/>
+            </a:solidFill>
+          </a:ln>
+          <a:effectLst/>
+        </p:spPr>
+        <p:style>
+          <a:lnRef idx="1">
+            <a:schemeClr val="accent1"/>
+          </a:lnRef>
+          <a:fillRef idx="3">
+            <a:schemeClr val="accent1"/>
+          </a:fillRef>
+          <a:effectRef idx="2">
+            <a:schemeClr val="accent1"/>
+          </a:effectRef>
+          <a:fontRef idx="minor">
+            <a:schemeClr val="lt1"/>
+          </a:fontRef>
+        </p:style>
+        <p:txBody>
+          <a:bodyPr rtlCol="0" anchor="ctr"/>
+          <a:lstStyle/>
+          <a:p>
+            <a:pPr algn="ctr"/>
+            <a:endParaRPr/>
+          </a:p>
+        </p:txBody>
+      </p:sp>
+      <p:sp>
+        <p:nvSpPr>
+          <p:cNvPr id="11" name="TextBox 10"/>
+          <p:cNvSpPr txBox="1"/>
+          <p:nvPr/>
+        </p:nvSpPr>
+        <p:spPr>
+          <a:xfrm>
+            <a:off x="8358987" y="2148840"/>
+            <a:ext cx="3154680" cy="2148840"/>
+          </a:xfrm>
+          <a:prstGeom prst="rect">
+            <a:avLst/>
+          </a:prstGeom>
+          <a:noFill/>
+        </p:spPr>
+        <p:txBody>
+          <a:bodyPr wrap="square" lIns="0" tIns="0" rIns="0" bIns="0" anchor="ctr">
+            <a:spAutoFit/>
+          </a:bodyPr>
+          <a:lstStyle/>
+          <a:p>
+            <a:pPr algn="ctr">
+              <a:spcAft>
+                <a:spcPts val="800"/>
+              </a:spcAft>
+            </a:pPr>
+            <a:r>
+              <a:rPr sz="3300" b="1" i="0">
+                <a:solidFill>
+                  <a:srgbClr val="FFCF4D"/>
+                </a:solidFill>
+                <a:latin typeface="Arial"/>
+              </a:rPr>
+              <a:t>GRADE</a:t>
+            </a:r>
+          </a:p>
+          <a:p>
+            <a:pPr algn="ctr"/>
+            <a:r>
+              <a:rPr sz="1250" b="0" i="0">
+                <a:solidFill>
+                  <a:srgbClr val="CFE3FF"/>
+                </a:solidFill>
+                <a:latin typeface="Arial"/>
+              </a:rPr>
+              <a:t>GEO 40/30/30 altitude·circularity·proximity — Moon 50/50</a:t>
+            </a:r>
+          </a:p>
+        </p:txBody>
+      </p:sp>
+      <p:sp>
+        <p:nvSpPr>
+          <p:cNvPr id="12" name="TextBox 11"/>
+          <p:cNvSpPr txBox="1"/>
+          <p:nvPr/>
+        </p:nvSpPr>
+        <p:spPr>
+          <a:xfrm>
+            <a:off x="548640" y="4709160"/>
+            <a:ext cx="11064240" cy="1280160"/>
+          </a:xfrm>
+          <a:prstGeom prst="rect">
+            <a:avLst/>
+          </a:prstGeom>
+          <a:noFill/>
+        </p:spPr>
+        <p:txBody>
+          <a:bodyPr wrap="square" lIns="0" tIns="0" rIns="0" bIns="0">
+            <a:spAutoFit/>
+          </a:bodyPr>
+          <a:lstStyle/>
+          <a:p>
+            <a:pPr algn="l"/>
+            <a:r>
+              <a:rPr sz="1350" b="0" i="1">
+                <a:solidFill>
+                  <a:srgbClr val="CFE3FF"/>
+                </a:solidFill>
+                <a:latin typeface="Arial"/>
+              </a:rPr>
+              <a:t>Touching the target box is not success: you must HOLD it, which leaves room to trim and rules out flukes. Ways to fail outright: re-entry, lunar impact, escape, a dry tank while off-target — or closing within 100 m of the satellite you were sent to service, which is a collision, not a rendezvous.</a:t>
+            </a:r>
+          </a:p>
+        </p:txBody>
+      </p:sp>
+    </p:spTree>
+  </p:cSld>
+  <p:clrMapOvr>
+    <a:masterClrMapping/>
+  </p:clrMapOvr>
+</p:sld>
+</file>
+
+<file path=ppt/slides/slide11.xml><?xml version="1.0" encoding="utf-8"?>
+<p:sld xmlns:a="http://schemas.openxmlformats.org/drawingml/2006/main" xmlns:r="http://schemas.openxmlformats.org/officeDocument/2006/relationships" xmlns:p="http://schemas.openxmlformats.org/presentationml/2006/main">
+  <p:cSld>
+    <p:bg>
+      <p:bgPr>
+        <a:solidFill>
+          <a:srgbClr val="050A14"/>
+        </a:solidFill>
+        <a:effectLst/>
+      </p:bgPr>
+    </p:bg>
+    <p:spTree>
+      <p:nvGrpSpPr>
+        <p:cNvPr id="1" name=""/>
+        <p:cNvGrpSpPr/>
+        <p:nvPr/>
+      </p:nvGrpSpPr>
+      <p:grpSpPr>
+        <a:xfrm>
+          <a:off x="0" y="0"/>
+          <a:ext cx="0" cy="0"/>
+          <a:chOff x="0" y="0"/>
+          <a:chExt cx="0" cy="0"/>
+        </a:xfrm>
+      </p:grpSpPr>
+      <p:sp>
+        <p:nvSpPr>
+          <p:cNvPr id="2" name="TextBox 1"/>
+          <p:cNvSpPr txBox="1"/>
+          <p:nvPr/>
+        </p:nvSpPr>
+        <p:spPr>
+          <a:xfrm>
+            <a:off x="548640" y="384048"/>
+            <a:ext cx="8686800" cy="292608"/>
+          </a:xfrm>
+          <a:prstGeom prst="rect">
+            <a:avLst/>
+          </a:prstGeom>
+          <a:noFill/>
+        </p:spPr>
+        <p:txBody>
+          <a:bodyPr wrap="square" lIns="0" tIns="0" rIns="0" bIns="0">
+            <a:spAutoFit/>
+          </a:bodyPr>
+          <a:lstStyle/>
+          <a:p>
+            <a:pPr algn="l"/>
+            <a:r>
+              <a:rPr sz="1100" b="1" i="0">
+                <a:solidFill>
+                  <a:srgbClr val="FFCF4D"/>
+                </a:solidFill>
+                <a:latin typeface="Arial"/>
+              </a:rPr>
+              <a:t>MODULE 8 · ORBIT ACADEMY</a:t>
+            </a:r>
+          </a:p>
+        </p:txBody>
+      </p:sp>
+      <p:sp>
+        <p:nvSpPr>
+          <p:cNvPr id="3" name="TextBox 2"/>
+          <p:cNvSpPr txBox="1"/>
+          <p:nvPr/>
+        </p:nvSpPr>
+        <p:spPr>
+          <a:xfrm>
+            <a:off x="548640" y="676656"/>
+            <a:ext cx="10058400" cy="640080"/>
+          </a:xfrm>
+          <a:prstGeom prst="rect">
+            <a:avLst/>
+          </a:prstGeom>
+          <a:noFill/>
+        </p:spPr>
+        <p:txBody>
+          <a:bodyPr wrap="square" lIns="0" tIns="0" rIns="0" bIns="0">
+            <a:spAutoFit/>
+          </a:bodyPr>
+          <a:lstStyle/>
+          <a:p>
+            <a:pPr algn="l"/>
+            <a:r>
+              <a:rPr sz="2700" b="1" i="0">
+                <a:solidFill>
+                  <a:srgbClr val="5FD0FF"/>
+                </a:solidFill>
+                <a:latin typeface="Arial"/>
+              </a:rPr>
+              <a:t>What you'll do</a:t>
+            </a:r>
+          </a:p>
+        </p:txBody>
+      </p:sp>
+      <p:sp>
+        <p:nvSpPr>
+          <p:cNvPr id="4" name="Oval 3"/>
+          <p:cNvSpPr/>
+          <p:nvPr/>
+        </p:nvSpPr>
+        <p:spPr>
+          <a:xfrm>
+            <a:off x="10835640" y="484632"/>
+            <a:ext cx="914400" cy="347472"/>
+          </a:xfrm>
+          <a:prstGeom prst="ellipse">
+            <a:avLst/>
+          </a:prstGeom>
+          <a:noFill/>
+          <a:ln w="12700">
+            <a:solidFill>
+              <a:srgbClr val="2A4A74"/>
+            </a:solidFill>
+          </a:ln>
+          <a:effectLst/>
+        </p:spPr>
+        <p:style>
+          <a:lnRef idx="1">
+            <a:schemeClr val="accent1"/>
+          </a:lnRef>
+          <a:fillRef idx="3">
+            <a:schemeClr val="accent1"/>
+          </a:fillRef>
+          <a:effectRef idx="2">
+            <a:schemeClr val="accent1"/>
+          </a:effectRef>
+          <a:fontRef idx="minor">
+            <a:schemeClr val="lt1"/>
+          </a:fontRef>
+        </p:style>
+        <p:txBody>
+          <a:bodyPr rtlCol="0" anchor="ctr"/>
+          <a:lstStyle/>
+          <a:p>
+            <a:pPr algn="ctr"/>
+            <a:endParaRPr/>
+          </a:p>
+        </p:txBody>
+      </p:sp>
+      <p:sp>
+        <p:nvSpPr>
+          <p:cNvPr id="5" name="Oval 4"/>
+          <p:cNvSpPr/>
+          <p:nvPr/>
+        </p:nvSpPr>
+        <p:spPr>
+          <a:xfrm>
+            <a:off x="11708892" y="617219"/>
+            <a:ext cx="82296" cy="82296"/>
+          </a:xfrm>
+          <a:prstGeom prst="ellipse">
+            <a:avLst/>
+          </a:prstGeom>
+          <a:solidFill>
+            <a:srgbClr val="FFCF4D"/>
+          </a:solidFill>
+          <a:ln>
+            <a:noFill/>
+          </a:ln>
+          <a:effectLst/>
+        </p:spPr>
+        <p:style>
+          <a:lnRef idx="1">
+            <a:schemeClr val="accent1"/>
+          </a:lnRef>
+          <a:fillRef idx="3">
+            <a:schemeClr val="accent1"/>
+          </a:fillRef>
+          <a:effectRef idx="2">
+            <a:schemeClr val="accent1"/>
+          </a:effectRef>
+          <a:fontRef idx="minor">
+            <a:schemeClr val="lt1"/>
+          </a:fontRef>
+        </p:style>
+        <p:txBody>
+          <a:bodyPr rtlCol="0" anchor="ctr"/>
+          <a:lstStyle/>
+          <a:p>
+            <a:pPr algn="ctr"/>
+            <a:endParaRPr/>
+          </a:p>
+        </p:txBody>
+      </p:sp>
+      <p:sp>
+        <p:nvSpPr>
+          <p:cNvPr id="6" name="Rounded Rectangle 5"/>
+          <p:cNvSpPr/>
+          <p:nvPr/>
+        </p:nvSpPr>
+        <p:spPr>
+          <a:xfrm>
+            <a:off x="548640" y="1645920"/>
+            <a:ext cx="2834640" cy="960120"/>
+          </a:xfrm>
+          <a:prstGeom prst="roundRect">
+            <a:avLst>
+              <a:gd name="adj" fmla="val 7000"/>
+            </a:avLst>
+          </a:prstGeom>
+          <a:solidFill>
+            <a:srgbClr val="0A1830"/>
+          </a:solidFill>
+          <a:ln w="12700">
+            <a:solidFill>
+              <a:srgbClr val="1E3A5F"/>
+            </a:solidFill>
+          </a:ln>
+          <a:effectLst/>
+        </p:spPr>
+        <p:style>
+          <a:lnRef idx="1">
+            <a:schemeClr val="accent1"/>
+          </a:lnRef>
+          <a:fillRef idx="3">
+            <a:schemeClr val="accent1"/>
+          </a:fillRef>
+          <a:effectRef idx="2">
+            <a:schemeClr val="accent1"/>
+          </a:effectRef>
+          <a:fontRef idx="minor">
+            <a:schemeClr val="lt1"/>
+          </a:fontRef>
+        </p:style>
+        <p:txBody>
+          <a:bodyPr rtlCol="0" anchor="ctr"/>
+          <a:lstStyle/>
+          <a:p>
+            <a:pPr algn="ctr"/>
+            <a:endParaRPr/>
+          </a:p>
+        </p:txBody>
+      </p:sp>
+      <p:sp>
+        <p:nvSpPr>
+          <p:cNvPr id="7" name="TextBox 6"/>
+          <p:cNvSpPr txBox="1"/>
+          <p:nvPr/>
+        </p:nvSpPr>
+        <p:spPr>
+          <a:xfrm>
+            <a:off x="777240" y="1645920"/>
+            <a:ext cx="2377440" cy="960120"/>
+          </a:xfrm>
+          <a:prstGeom prst="rect">
+            <a:avLst/>
+          </a:prstGeom>
+          <a:noFill/>
+        </p:spPr>
+        <p:txBody>
+          <a:bodyPr wrap="square" lIns="0" tIns="0" rIns="0" bIns="0" anchor="ctr">
+            <a:spAutoFit/>
+          </a:bodyPr>
+          <a:lstStyle/>
+          <a:p>
+            <a:pPr algn="l">
+              <a:spcAft>
+                <a:spcPts val="300"/>
+              </a:spcAft>
+            </a:pPr>
+            <a:r>
+              <a:rPr sz="1500" b="1" i="0">
+                <a:solidFill>
+                  <a:srgbClr val="39D353"/>
+                </a:solidFill>
+                <a:latin typeface="Arial"/>
+              </a:rPr>
+              <a:t>PREDICT</a:t>
+            </a:r>
+          </a:p>
+          <a:p>
+            <a:pPr algn="l"/>
+            <a:r>
+              <a:rPr sz="1050" b="0" i="0">
+                <a:solidFill>
+                  <a:srgbClr val="7E93B8"/>
+                </a:solidFill>
+                <a:latin typeface="Arial"/>
+              </a:rPr>
+              <a:t>call your shot first</a:t>
+            </a:r>
+          </a:p>
+        </p:txBody>
+      </p:sp>
+      <p:sp>
+        <p:nvSpPr>
+          <p:cNvPr id="8" name="TextBox 7"/>
+          <p:cNvSpPr txBox="1"/>
+          <p:nvPr/>
+        </p:nvSpPr>
+        <p:spPr>
+          <a:xfrm>
+            <a:off x="3401568" y="1810512"/>
+            <a:ext cx="411480" cy="548640"/>
+          </a:xfrm>
+          <a:prstGeom prst="rect">
+            <a:avLst/>
+          </a:prstGeom>
+          <a:noFill/>
+        </p:spPr>
+        <p:txBody>
+          <a:bodyPr wrap="square" lIns="0" tIns="0" rIns="0" bIns="0">
+            <a:spAutoFit/>
+          </a:bodyPr>
+          <a:lstStyle/>
+          <a:p>
+            <a:pPr algn="ctr"/>
+            <a:r>
+              <a:rPr sz="2200" b="1" i="0">
+                <a:solidFill>
+                  <a:srgbClr val="FFCF4D"/>
+                </a:solidFill>
+                <a:latin typeface="Arial"/>
+              </a:rPr>
+              <a:t>→</a:t>
+            </a:r>
+          </a:p>
+        </p:txBody>
+      </p:sp>
+      <p:sp>
+        <p:nvSpPr>
+          <p:cNvPr id="9" name="Rounded Rectangle 8"/>
+          <p:cNvSpPr/>
+          <p:nvPr/>
+        </p:nvSpPr>
+        <p:spPr>
+          <a:xfrm>
+            <a:off x="3794759" y="1645920"/>
+            <a:ext cx="2834640" cy="960120"/>
+          </a:xfrm>
+          <a:prstGeom prst="roundRect">
+            <a:avLst>
+              <a:gd name="adj" fmla="val 7000"/>
+            </a:avLst>
+          </a:prstGeom>
+          <a:solidFill>
+            <a:srgbClr val="0A1830"/>
+          </a:solidFill>
+          <a:ln w="12700">
+            <a:solidFill>
+              <a:srgbClr val="1E3A5F"/>
+            </a:solidFill>
+          </a:ln>
+          <a:effectLst/>
+        </p:spPr>
+        <p:style>
+          <a:lnRef idx="1">
+            <a:schemeClr val="accent1"/>
+          </a:lnRef>
+          <a:fillRef idx="3">
+            <a:schemeClr val="accent1"/>
+          </a:fillRef>
+          <a:effectRef idx="2">
+            <a:schemeClr val="accent1"/>
+          </a:effectRef>
+          <a:fontRef idx="minor">
+            <a:schemeClr val="lt1"/>
+          </a:fontRef>
+        </p:style>
+        <p:txBody>
+          <a:bodyPr rtlCol="0" anchor="ctr"/>
+          <a:lstStyle/>
+          <a:p>
+            <a:pPr algn="ctr"/>
+            <a:endParaRPr/>
+          </a:p>
+        </p:txBody>
+      </p:sp>
+      <p:sp>
+        <p:nvSpPr>
+          <p:cNvPr id="10" name="TextBox 9"/>
+          <p:cNvSpPr txBox="1"/>
+          <p:nvPr/>
+        </p:nvSpPr>
+        <p:spPr>
+          <a:xfrm>
+            <a:off x="4023359" y="1645920"/>
+            <a:ext cx="2377440" cy="960120"/>
+          </a:xfrm>
+          <a:prstGeom prst="rect">
+            <a:avLst/>
+          </a:prstGeom>
+          <a:noFill/>
+        </p:spPr>
+        <p:txBody>
+          <a:bodyPr wrap="square" lIns="0" tIns="0" rIns="0" bIns="0" anchor="ctr">
+            <a:spAutoFit/>
+          </a:bodyPr>
+          <a:lstStyle/>
+          <a:p>
+            <a:pPr algn="l">
+              <a:spcAft>
+                <a:spcPts val="300"/>
+              </a:spcAft>
+            </a:pPr>
+            <a:r>
+              <a:rPr sz="1500" b="1" i="0">
+                <a:solidFill>
+                  <a:srgbClr val="39D353"/>
+                </a:solidFill>
+                <a:latin typeface="Arial"/>
+              </a:rPr>
+              <a:t>TRY</a:t>
+            </a:r>
+          </a:p>
+          <a:p>
+            <a:pPr algn="l"/>
+            <a:r>
+              <a:rPr sz="1050" b="0" i="0">
+                <a:solidFill>
+                  <a:srgbClr val="7E93B8"/>
+                </a:solidFill>
+                <a:latin typeface="Arial"/>
+              </a:rPr>
+              <a:t>run it in the simulator</a:t>
+            </a:r>
+          </a:p>
+        </p:txBody>
+      </p:sp>
+      <p:sp>
+        <p:nvSpPr>
+          <p:cNvPr id="11" name="TextBox 10"/>
+          <p:cNvSpPr txBox="1"/>
+          <p:nvPr/>
+        </p:nvSpPr>
+        <p:spPr>
+          <a:xfrm>
+            <a:off x="6647688" y="1810512"/>
+            <a:ext cx="411480" cy="548640"/>
+          </a:xfrm>
+          <a:prstGeom prst="rect">
+            <a:avLst/>
+          </a:prstGeom>
+          <a:noFill/>
+        </p:spPr>
+        <p:txBody>
+          <a:bodyPr wrap="square" lIns="0" tIns="0" rIns="0" bIns="0">
+            <a:spAutoFit/>
+          </a:bodyPr>
+          <a:lstStyle/>
+          <a:p>
+            <a:pPr algn="ctr"/>
+            <a:r>
+              <a:rPr sz="2200" b="1" i="0">
+                <a:solidFill>
+                  <a:srgbClr val="FFCF4D"/>
+                </a:solidFill>
+                <a:latin typeface="Arial"/>
+              </a:rPr>
+              <a:t>→</a:t>
+            </a:r>
+          </a:p>
+        </p:txBody>
+      </p:sp>
+      <p:sp>
+        <p:nvSpPr>
+          <p:cNvPr id="12" name="Rounded Rectangle 11"/>
+          <p:cNvSpPr/>
+          <p:nvPr/>
+        </p:nvSpPr>
+        <p:spPr>
+          <a:xfrm>
+            <a:off x="7040879" y="1645920"/>
+            <a:ext cx="2834640" cy="960120"/>
+          </a:xfrm>
+          <a:prstGeom prst="roundRect">
+            <a:avLst>
+              <a:gd name="adj" fmla="val 7000"/>
+            </a:avLst>
+          </a:prstGeom>
+          <a:solidFill>
+            <a:srgbClr val="0A1830"/>
+          </a:solidFill>
+          <a:ln w="12700">
+            <a:solidFill>
+              <a:srgbClr val="1E3A5F"/>
+            </a:solidFill>
+          </a:ln>
+          <a:effectLst/>
+        </p:spPr>
+        <p:style>
+          <a:lnRef idx="1">
+            <a:schemeClr val="accent1"/>
+          </a:lnRef>
+          <a:fillRef idx="3">
+            <a:schemeClr val="accent1"/>
+          </a:fillRef>
+          <a:effectRef idx="2">
+            <a:schemeClr val="accent1"/>
+          </a:effectRef>
+          <a:fontRef idx="minor">
+            <a:schemeClr val="lt1"/>
+          </a:fontRef>
+        </p:style>
+        <p:txBody>
+          <a:bodyPr rtlCol="0" anchor="ctr"/>
+          <a:lstStyle/>
+          <a:p>
+            <a:pPr algn="ctr"/>
+            <a:endParaRPr/>
+          </a:p>
+        </p:txBody>
+      </p:sp>
+      <p:sp>
+        <p:nvSpPr>
+          <p:cNvPr id="13" name="TextBox 12"/>
+          <p:cNvSpPr txBox="1"/>
+          <p:nvPr/>
+        </p:nvSpPr>
+        <p:spPr>
+          <a:xfrm>
+            <a:off x="7269479" y="1645920"/>
+            <a:ext cx="2377440" cy="960120"/>
+          </a:xfrm>
+          <a:prstGeom prst="rect">
+            <a:avLst/>
+          </a:prstGeom>
+          <a:noFill/>
+        </p:spPr>
+        <p:txBody>
+          <a:bodyPr wrap="square" lIns="0" tIns="0" rIns="0" bIns="0" anchor="ctr">
+            <a:spAutoFit/>
+          </a:bodyPr>
+          <a:lstStyle/>
+          <a:p>
+            <a:pPr algn="l">
+              <a:spcAft>
+                <a:spcPts val="300"/>
+              </a:spcAft>
+            </a:pPr>
+            <a:r>
+              <a:rPr sz="1500" b="1" i="0">
+                <a:solidFill>
+                  <a:srgbClr val="39D353"/>
+                </a:solidFill>
+                <a:latin typeface="Arial"/>
+              </a:rPr>
+              <a:t>OBSERVE</a:t>
+            </a:r>
+          </a:p>
+          <a:p>
+            <a:pPr algn="l"/>
+            <a:r>
+              <a:rPr sz="1050" b="0" i="0">
+                <a:solidFill>
+                  <a:srgbClr val="7E93B8"/>
+                </a:solidFill>
+                <a:latin typeface="Arial"/>
+              </a:rPr>
+              <a:t>note what actually changed</a:t>
+            </a:r>
+          </a:p>
+        </p:txBody>
+      </p:sp>
+      <p:sp>
+        <p:nvSpPr>
+          <p:cNvPr id="14" name="Oval 13"/>
+          <p:cNvSpPr/>
+          <p:nvPr/>
+        </p:nvSpPr>
+        <p:spPr>
+          <a:xfrm>
+            <a:off x="690371" y="3278124"/>
+            <a:ext cx="118872" cy="118872"/>
+          </a:xfrm>
+          <a:prstGeom prst="ellipse">
+            <a:avLst/>
+          </a:prstGeom>
+          <a:solidFill>
+            <a:srgbClr val="FFCF4D"/>
+          </a:solidFill>
+          <a:ln>
+            <a:noFill/>
+          </a:ln>
+          <a:effectLst/>
+        </p:spPr>
+        <p:style>
+          <a:lnRef idx="1">
+            <a:schemeClr val="accent1"/>
+          </a:lnRef>
+          <a:fillRef idx="3">
+            <a:schemeClr val="accent1"/>
+          </a:fillRef>
+          <a:effectRef idx="2">
+            <a:schemeClr val="accent1"/>
+          </a:effectRef>
+          <a:fontRef idx="minor">
+            <a:schemeClr val="lt1"/>
+          </a:fontRef>
+        </p:style>
+        <p:txBody>
+          <a:bodyPr rtlCol="0" anchor="ctr"/>
+          <a:lstStyle/>
+          <a:p>
+            <a:pPr algn="ctr"/>
+            <a:endParaRPr/>
+          </a:p>
+        </p:txBody>
+      </p:sp>
+      <p:sp>
+        <p:nvSpPr>
+          <p:cNvPr id="15" name="TextBox 14"/>
+          <p:cNvSpPr txBox="1"/>
+          <p:nvPr/>
+        </p:nvSpPr>
+        <p:spPr>
+          <a:xfrm>
+            <a:off x="1005840" y="3200400"/>
+            <a:ext cx="10607040" cy="685800"/>
+          </a:xfrm>
+          <a:prstGeom prst="rect">
+            <a:avLst/>
+          </a:prstGeom>
+          <a:noFill/>
+        </p:spPr>
+        <p:txBody>
+          <a:bodyPr wrap="square" lIns="0" tIns="0" rIns="0" bIns="0">
+            <a:spAutoFit/>
+          </a:bodyPr>
+          <a:lstStyle/>
+          <a:p>
+            <a:pPr algn="l"/>
+            <a:r>
+              <a:rPr sz="1350" b="0" i="0">
+                <a:solidFill>
+                  <a:srgbClr val="CFE3FF"/>
+                </a:solidFill>
+                <a:latin typeface="Arial"/>
+              </a:rPr>
+              <a:t>TRAIN first: feel what prograde, retrograde and radial burns do — including the backwards-to-catch-up rule.</a:t>
+            </a:r>
+          </a:p>
+        </p:txBody>
+      </p:sp>
+      <p:sp>
+        <p:nvSpPr>
+          <p:cNvPr id="16" name="Oval 15"/>
+          <p:cNvSpPr/>
+          <p:nvPr/>
+        </p:nvSpPr>
+        <p:spPr>
+          <a:xfrm>
+            <a:off x="690371" y="3991356"/>
+            <a:ext cx="118872" cy="118872"/>
+          </a:xfrm>
+          <a:prstGeom prst="ellipse">
+            <a:avLst/>
+          </a:prstGeom>
+          <a:solidFill>
+            <a:srgbClr val="FFCF4D"/>
+          </a:solidFill>
+          <a:ln>
+            <a:noFill/>
+          </a:ln>
+          <a:effectLst/>
+        </p:spPr>
+        <p:style>
+          <a:lnRef idx="1">
+            <a:schemeClr val="accent1"/>
+          </a:lnRef>
+          <a:fillRef idx="3">
+            <a:schemeClr val="accent1"/>
+          </a:fillRef>
+          <a:effectRef idx="2">
+            <a:schemeClr val="accent1"/>
+          </a:effectRef>
+          <a:fontRef idx="minor">
+            <a:schemeClr val="lt1"/>
+          </a:fontRef>
+        </p:style>
+        <p:txBody>
+          <a:bodyPr rtlCol="0" anchor="ctr"/>
+          <a:lstStyle/>
+          <a:p>
+            <a:pPr algn="ctr"/>
+            <a:endParaRPr/>
+          </a:p>
+        </p:txBody>
+      </p:sp>
+      <p:sp>
+        <p:nvSpPr>
+          <p:cNvPr id="17" name="TextBox 16"/>
+          <p:cNvSpPr txBox="1"/>
+          <p:nvPr/>
+        </p:nvSpPr>
+        <p:spPr>
+          <a:xfrm>
+            <a:off x="1005840" y="3913632"/>
+            <a:ext cx="10607040" cy="685800"/>
+          </a:xfrm>
+          <a:prstGeom prst="rect">
+            <a:avLst/>
+          </a:prstGeom>
+          <a:noFill/>
+        </p:spPr>
+        <p:txBody>
+          <a:bodyPr wrap="square" lIns="0" tIns="0" rIns="0" bIns="0">
+            <a:spAutoFit/>
+          </a:bodyPr>
+          <a:lstStyle/>
+          <a:p>
+            <a:pPr algn="l"/>
+            <a:r>
+              <a:rPr sz="1350" b="0" i="0">
+                <a:solidFill>
+                  <a:srgbClr val="CFE3FF"/>
+                </a:solidFill>
+                <a:latin typeface="Arial"/>
+              </a:rPr>
+              <a:t>PLAN: compute burn 1 and burn 2, log each Δv, and check the total against the 6,500 m/s tank.</a:t>
+            </a:r>
+          </a:p>
+        </p:txBody>
+      </p:sp>
+      <p:sp>
+        <p:nvSpPr>
+          <p:cNvPr id="18" name="Oval 17"/>
+          <p:cNvSpPr/>
+          <p:nvPr/>
+        </p:nvSpPr>
+        <p:spPr>
+          <a:xfrm>
+            <a:off x="690371" y="4704588"/>
+            <a:ext cx="118872" cy="118872"/>
+          </a:xfrm>
+          <a:prstGeom prst="ellipse">
+            <a:avLst/>
+          </a:prstGeom>
+          <a:solidFill>
+            <a:srgbClr val="FFCF4D"/>
+          </a:solidFill>
+          <a:ln>
+            <a:noFill/>
+          </a:ln>
+          <a:effectLst/>
+        </p:spPr>
+        <p:style>
+          <a:lnRef idx="1">
+            <a:schemeClr val="accent1"/>
+          </a:lnRef>
+          <a:fillRef idx="3">
+            <a:schemeClr val="accent1"/>
+          </a:fillRef>
+          <a:effectRef idx="2">
+            <a:schemeClr val="accent1"/>
+          </a:effectRef>
+          <a:fontRef idx="minor">
+            <a:schemeClr val="lt1"/>
+          </a:fontRef>
+        </p:style>
+        <p:txBody>
+          <a:bodyPr rtlCol="0" anchor="ctr"/>
+          <a:lstStyle/>
+          <a:p>
+            <a:pPr algn="ctr"/>
+            <a:endParaRPr/>
+          </a:p>
+        </p:txBody>
+      </p:sp>
+      <p:sp>
+        <p:nvSpPr>
+          <p:cNvPr id="19" name="TextBox 18"/>
+          <p:cNvSpPr txBox="1"/>
+          <p:nvPr/>
+        </p:nvSpPr>
+        <p:spPr>
+          <a:xfrm>
+            <a:off x="1005840" y="4626864"/>
+            <a:ext cx="10607040" cy="685800"/>
+          </a:xfrm>
+          <a:prstGeom prst="rect">
+            <a:avLst/>
+          </a:prstGeom>
+          <a:noFill/>
+        </p:spPr>
+        <p:txBody>
+          <a:bodyPr wrap="square" lIns="0" tIns="0" rIns="0" bIns="0">
+            <a:spAutoFit/>
+          </a:bodyPr>
+          <a:lstStyle/>
+          <a:p>
+            <a:pPr algn="l"/>
+            <a:r>
+              <a:rPr sz="1350" b="0" i="0">
+                <a:solidFill>
+                  <a:srgbClr val="CFE3FF"/>
+                </a:solidFill>
+                <a:latin typeface="Arial"/>
+              </a:rPr>
+              <a:t>FLY the GEO mission by hand, then again on AUTO — compare the Δv and the grade. Then phase ~8° to the target and hold station.</a:t>
+            </a:r>
+          </a:p>
+        </p:txBody>
+      </p:sp>
+      <p:sp>
+        <p:nvSpPr>
+          <p:cNvPr id="20" name="Oval 19"/>
+          <p:cNvSpPr/>
+          <p:nvPr/>
+        </p:nvSpPr>
+        <p:spPr>
+          <a:xfrm>
+            <a:off x="690371" y="5417820"/>
+            <a:ext cx="118872" cy="118872"/>
+          </a:xfrm>
+          <a:prstGeom prst="ellipse">
+            <a:avLst/>
+          </a:prstGeom>
+          <a:solidFill>
+            <a:srgbClr val="FFCF4D"/>
+          </a:solidFill>
+          <a:ln>
+            <a:noFill/>
+          </a:ln>
+          <a:effectLst/>
+        </p:spPr>
+        <p:style>
+          <a:lnRef idx="1">
+            <a:schemeClr val="accent1"/>
+          </a:lnRef>
+          <a:fillRef idx="3">
+            <a:schemeClr val="accent1"/>
+          </a:fillRef>
+          <a:effectRef idx="2">
+            <a:schemeClr val="accent1"/>
+          </a:effectRef>
+          <a:fontRef idx="minor">
+            <a:schemeClr val="lt1"/>
+          </a:fontRef>
+        </p:style>
+        <p:txBody>
+          <a:bodyPr rtlCol="0" anchor="ctr"/>
+          <a:lstStyle/>
+          <a:p>
+            <a:pPr algn="ctr"/>
+            <a:endParaRPr/>
+          </a:p>
+        </p:txBody>
+      </p:sp>
+      <p:sp>
+        <p:nvSpPr>
+          <p:cNvPr id="21" name="TextBox 20"/>
+          <p:cNvSpPr txBox="1"/>
+          <p:nvPr/>
+        </p:nvSpPr>
+        <p:spPr>
+          <a:xfrm>
+            <a:off x="1005840" y="5340096"/>
+            <a:ext cx="10607040" cy="685800"/>
+          </a:xfrm>
+          <a:prstGeom prst="rect">
+            <a:avLst/>
+          </a:prstGeom>
+          <a:noFill/>
+        </p:spPr>
+        <p:txBody>
+          <a:bodyPr wrap="square" lIns="0" tIns="0" rIns="0" bIns="0">
+            <a:spAutoFit/>
+          </a:bodyPr>
+          <a:lstStyle/>
+          <a:p>
+            <a:pPr algn="l"/>
+            <a:r>
+              <a:rPr sz="1350" b="0" i="0">
+                <a:solidFill>
+                  <a:srgbClr val="CFE3FF"/>
+                </a:solidFill>
+                <a:latin typeface="Arial"/>
+              </a:rPr>
+              <a:t>Graduate: THREE burns to the Moon — TLI, the brake at closest approach, then circularize at an apsis.</a:t>
+            </a:r>
+          </a:p>
+        </p:txBody>
+      </p:sp>
+    </p:spTree>
+  </p:cSld>
+  <p:clrMapOvr>
+    <a:masterClrMapping/>
+  </p:clrMapOvr>
+</p:sld>
+</file>
+
+<file path=ppt/slides/slide12.xml><?xml version="1.0" encoding="utf-8"?>
+<p:sld xmlns:a="http://schemas.openxmlformats.org/drawingml/2006/main" xmlns:r="http://schemas.openxmlformats.org/officeDocument/2006/relationships" xmlns:p="http://schemas.openxmlformats.org/presentationml/2006/main">
+  <p:cSld>
+    <p:bg>
+      <p:bgPr>
+        <a:solidFill>
+          <a:srgbClr val="050A14"/>
+        </a:solidFill>
+        <a:effectLst/>
+      </p:bgPr>
+    </p:bg>
+    <p:spTree>
+      <p:nvGrpSpPr>
+        <p:cNvPr id="1" name=""/>
+        <p:cNvGrpSpPr/>
+        <p:nvPr/>
+      </p:nvGrpSpPr>
+      <p:grpSpPr>
+        <a:xfrm>
+          <a:off x="0" y="0"/>
+          <a:ext cx="0" cy="0"/>
+          <a:chOff x="0" y="0"/>
+          <a:chExt cx="0" cy="0"/>
+        </a:xfrm>
+      </p:grpSpPr>
+      <p:sp>
+        <p:nvSpPr>
+          <p:cNvPr id="2" name="Oval 1"/>
+          <p:cNvSpPr/>
+          <p:nvPr/>
+        </p:nvSpPr>
+        <p:spPr>
+          <a:xfrm>
+            <a:off x="4953304" y="548640"/>
+            <a:ext cx="2286000" cy="822960"/>
+          </a:xfrm>
+          <a:prstGeom prst="ellipse">
+            <a:avLst/>
+          </a:prstGeom>
+          <a:noFill/>
+          <a:ln w="15875">
+            <a:solidFill>
+              <a:srgbClr val="2A4A74"/>
+            </a:solidFill>
+          </a:ln>
+          <a:effectLst/>
+        </p:spPr>
+        <p:style>
+          <a:lnRef idx="1">
+            <a:schemeClr val="accent1"/>
+          </a:lnRef>
+          <a:fillRef idx="3">
+            <a:schemeClr val="accent1"/>
+          </a:fillRef>
+          <a:effectRef idx="2">
+            <a:schemeClr val="accent1"/>
+          </a:effectRef>
+          <a:fontRef idx="minor">
+            <a:schemeClr val="lt1"/>
+          </a:fontRef>
+        </p:style>
+        <p:txBody>
+          <a:bodyPr rtlCol="0" anchor="ctr"/>
+          <a:lstStyle/>
+          <a:p>
+            <a:pPr algn="ctr"/>
+            <a:endParaRPr/>
+          </a:p>
+        </p:txBody>
+      </p:sp>
+      <p:sp>
+        <p:nvSpPr>
+          <p:cNvPr id="3" name="Oval 2"/>
+          <p:cNvSpPr/>
+          <p:nvPr/>
+        </p:nvSpPr>
+        <p:spPr>
+          <a:xfrm>
+            <a:off x="7189012" y="909828"/>
+            <a:ext cx="100584" cy="100584"/>
+          </a:xfrm>
+          <a:prstGeom prst="ellipse">
+            <a:avLst/>
+          </a:prstGeom>
+          <a:solidFill>
+            <a:srgbClr val="FFCF4D"/>
+          </a:solidFill>
+          <a:ln>
+            <a:noFill/>
+          </a:ln>
+          <a:effectLst/>
+        </p:spPr>
+        <p:style>
+          <a:lnRef idx="1">
+            <a:schemeClr val="accent1"/>
+          </a:lnRef>
+          <a:fillRef idx="3">
+            <a:schemeClr val="accent1"/>
+          </a:fillRef>
+          <a:effectRef idx="2">
+            <a:schemeClr val="accent1"/>
+          </a:effectRef>
+          <a:fontRef idx="minor">
+            <a:schemeClr val="lt1"/>
+          </a:fontRef>
+        </p:style>
+        <p:txBody>
+          <a:bodyPr rtlCol="0" anchor="ctr"/>
+          <a:lstStyle/>
+          <a:p>
+            <a:pPr algn="ctr"/>
+            <a:endParaRPr/>
+          </a:p>
+        </p:txBody>
+      </p:sp>
+      <p:sp>
+        <p:nvSpPr>
+          <p:cNvPr id="4" name="Oval 3"/>
+          <p:cNvSpPr/>
+          <p:nvPr/>
+        </p:nvSpPr>
+        <p:spPr>
+          <a:xfrm>
+            <a:off x="6055156" y="507492"/>
+            <a:ext cx="82296" cy="82296"/>
+          </a:xfrm>
+          <a:prstGeom prst="ellipse">
+            <a:avLst/>
+          </a:prstGeom>
+          <a:solidFill>
+            <a:srgbClr val="39D353"/>
+          </a:solidFill>
+          <a:ln>
+            <a:noFill/>
+          </a:ln>
+          <a:effectLst/>
+        </p:spPr>
+        <p:style>
+          <a:lnRef idx="1">
+            <a:schemeClr val="accent1"/>
+          </a:lnRef>
+          <a:fillRef idx="3">
+            <a:schemeClr val="accent1"/>
+          </a:fillRef>
+          <a:effectRef idx="2">
+            <a:schemeClr val="accent1"/>
+          </a:effectRef>
+          <a:fontRef idx="minor">
+            <a:schemeClr val="lt1"/>
+          </a:fontRef>
+        </p:style>
+        <p:txBody>
+          <a:bodyPr rtlCol="0" anchor="ctr"/>
+          <a:lstStyle/>
+          <a:p>
+            <a:pPr algn="ctr"/>
+            <a:endParaRPr/>
+          </a:p>
+        </p:txBody>
+      </p:sp>
+      <p:sp>
+        <p:nvSpPr>
+          <p:cNvPr id="5" name="TextBox 4"/>
+          <p:cNvSpPr txBox="1"/>
+          <p:nvPr/>
+        </p:nvSpPr>
+        <p:spPr>
+          <a:xfrm>
+            <a:off x="1097280" y="1737360"/>
+            <a:ext cx="9966960" cy="365760"/>
+          </a:xfrm>
+          <a:prstGeom prst="rect">
+            <a:avLst/>
+          </a:prstGeom>
+          <a:noFill/>
+        </p:spPr>
+        <p:txBody>
+          <a:bodyPr wrap="square" lIns="0" tIns="0" rIns="0" bIns="0">
+            <a:spAutoFit/>
+          </a:bodyPr>
+          <a:lstStyle/>
+          <a:p>
+            <a:pPr algn="ctr"/>
+            <a:r>
+              <a:rPr sz="1250" b="1" i="0">
+                <a:solidFill>
+                  <a:srgbClr val="FFCF4D"/>
+                </a:solidFill>
+                <a:latin typeface="Arial"/>
+              </a:rPr>
+              <a:t>THE ONE THING TO REMEMBER</a:t>
+            </a:r>
+          </a:p>
+        </p:txBody>
+      </p:sp>
+      <p:sp>
+        <p:nvSpPr>
+          <p:cNvPr id="6" name="TextBox 5"/>
+          <p:cNvSpPr txBox="1"/>
+          <p:nvPr/>
+        </p:nvSpPr>
+        <p:spPr>
+          <a:xfrm>
+            <a:off x="1234440" y="2743200"/>
+            <a:ext cx="9692640" cy="2011680"/>
+          </a:xfrm>
+          <a:prstGeom prst="rect">
+            <a:avLst/>
+          </a:prstGeom>
+          <a:noFill/>
+        </p:spPr>
+        <p:txBody>
+          <a:bodyPr wrap="square" lIns="0" tIns="0" rIns="0" bIns="0">
+            <a:spAutoFit/>
+          </a:bodyPr>
+          <a:lstStyle/>
+          <a:p>
+            <a:pPr algn="ctr"/>
+            <a:r>
+              <a:rPr sz="2900" b="1" i="0">
+                <a:solidFill>
+                  <a:srgbClr val="5FD0FF"/>
+                </a:solidFill>
+                <a:latin typeface="Arial"/>
+              </a:rPr>
+              <a:t>Plan the Δv, fly the plan — and to catch something ahead of you, drop LOWER.</a:t>
+            </a:r>
+          </a:p>
+        </p:txBody>
+      </p:sp>
+      <p:sp>
+        <p:nvSpPr>
+          <p:cNvPr id="7" name="TextBox 6"/>
+          <p:cNvSpPr txBox="1"/>
+          <p:nvPr/>
+        </p:nvSpPr>
+        <p:spPr>
+          <a:xfrm>
+            <a:off x="1097280" y="5212080"/>
+            <a:ext cx="9966960" cy="457200"/>
+          </a:xfrm>
+          <a:prstGeom prst="rect">
+            <a:avLst/>
+          </a:prstGeom>
+          <a:noFill/>
+        </p:spPr>
+        <p:txBody>
+          <a:bodyPr wrap="square" lIns="0" tIns="0" rIns="0" bIns="0">
+            <a:spAutoFit/>
+          </a:bodyPr>
+          <a:lstStyle/>
+          <a:p>
+            <a:pPr algn="ctr"/>
+            <a:r>
+              <a:rPr sz="1500" b="1" i="0">
+                <a:solidFill>
+                  <a:srgbClr val="39D353"/>
+                </a:solidFill>
+                <a:latin typeface="Arial"/>
+              </a:rPr>
+              <a:t>Open Worksheet 8 and keep the simulator beside it.</a:t>
+            </a:r>
+          </a:p>
+        </p:txBody>
+      </p:sp>
+    </p:spTree>
+  </p:cSld>
+  <p:clrMapOvr>
+    <a:masterClrMapping/>
+  </p:clrMapOvr>
+</p:sld>
+</file>
+
 <file path=ppt/slides/slide2.xml><?xml version="1.0" encoding="utf-8"?>
 <p:sld xmlns:a="http://schemas.openxmlformats.org/drawingml/2006/main" xmlns:r="http://schemas.openxmlformats.org/officeDocument/2006/relationships" xmlns:p="http://schemas.openxmlformats.org/presentationml/2006/main">
   <p:cSld>
@@ -4483,7 +6164,7 @@
                 </a:solidFill>
                 <a:latin typeface="Arial"/>
               </a:rPr>
-              <a:t>a two-burn transfer from LEO up to a target satellite at GEO.</a:t>
+              <a:t>a two-burn transfer up to the belt, then a phasing leg to rendezvous with a target satellite.</a:t>
             </a:r>
           </a:p>
         </p:txBody>
@@ -4583,7 +6264,7 @@
                 </a:solidFill>
                 <a:latin typeface="Arial"/>
               </a:rPr>
-              <a:t>unlocked by a clean GEO run: lead a moving target across 384,800 km.</a:t>
+              <a:t>unlocked by a clean GEO run: three burns to a parking orbit around a moving target 384,400 km away.</a:t>
             </a:r>
           </a:p>
         </p:txBody>
@@ -4697,7 +6378,7 @@
 </file>
 
 <file path=ppt/slides/slide3.xml><?xml version="1.0" encoding="utf-8"?>
-<p:sld xmlns:a="http://schemas.openxmlformats.org/drawingml/2006/main" xmlns:r="http://schemas.openxmlformats.org/officeDocument/2006/relationships" xmlns:p="http://schemas.openxmlformats.org/presentationml/2006/main">
+<p:sld xmlns:a="http://schemas.openxmlformats.org/drawingml/2006/main" xmlns:p="http://schemas.openxmlformats.org/presentationml/2006/main" xmlns:r="http://schemas.openxmlformats.org/officeDocument/2006/relationships">
   <p:cSld>
     <p:bg>
       <p:bgPr>
@@ -4713,14 +6394,7 @@
         <p:cNvGrpSpPr/>
         <p:nvPr/>
       </p:nvGrpSpPr>
-      <p:grpSpPr>
-        <a:xfrm>
-          <a:off x="0" y="0"/>
-          <a:ext cx="0" cy="0"/>
-          <a:chOff x="0" y="0"/>
-          <a:chExt cx="0" cy="0"/>
-        </a:xfrm>
-      </p:grpSpPr>
+      <p:grpSpPr/>
       <p:sp>
         <p:nvSpPr>
           <p:cNvPr id="2" name="TextBox 1"/>
@@ -4786,7 +6460,7 @@
                 </a:solidFill>
                 <a:latin typeface="Arial"/>
               </a:rPr>
-              <a:t>Mission 1 — GEO servicing</a:t>
+              <a:t>Δv is the currency</a:t>
             </a:r>
           </a:p>
         </p:txBody>
@@ -4964,7 +6638,7 @@
                 </a:solidFill>
                 <a:latin typeface="Arial"/>
               </a:rPr>
-              <a:t>2,400 m/s</a:t>
+              <a:t>a velocity change</a:t>
             </a:r>
           </a:p>
           <a:p>
@@ -4976,7 +6650,7 @@
                 </a:solidFill>
                 <a:latin typeface="Arial"/>
               </a:rPr>
-              <a:t>burn 1: raise apogee to GEO</a:t>
+              <a:t>what a burn physically delivers, in m/s</a:t>
             </a:r>
           </a:p>
         </p:txBody>
@@ -5064,7 +6738,7 @@
                 </a:solidFill>
                 <a:latin typeface="Arial"/>
               </a:rPr>
-              <a:t>1,460 m/s</a:t>
+              <a:t>exponential</a:t>
             </a:r>
           </a:p>
           <a:p>
@@ -5076,7 +6750,7 @@
                 </a:solidFill>
                 <a:latin typeface="Arial"/>
               </a:rPr>
-              <a:t>burn 2: circularize at apogee</a:t>
+              <a:t>each extra km/s costs far more launch mass</a:t>
             </a:r>
           </a:p>
         </p:txBody>
@@ -5164,7 +6838,7 @@
                 </a:solidFill>
                 <a:latin typeface="Arial"/>
               </a:rPr>
-              <a:t>3,860 / 4,800</a:t>
+              <a:t>6,500 / 9,500</a:t>
             </a:r>
           </a:p>
           <a:p>
@@ -5176,7 +6850,7 @@
                 </a:solidFill>
                 <a:latin typeface="Arial"/>
               </a:rPr>
-              <a:t>total burned vs the tank</a:t>
+              <a:t>m/s in the tank: GEO run / lunar flight</a:t>
             </a:r>
           </a:p>
         </p:txBody>
@@ -5211,7 +6885,7 @@
                 </a:solidFill>
                 <a:latin typeface="Arial"/>
               </a:rPr>
-              <a:t>Circularizing hurts because you arrive at apogee doing only 1.6 km/s — and GEO demands 3.1. Winning means HOLDING the target orbit a full revolution.</a:t>
+              <a:t>A burn does exactly one thing: it changes your velocity. Propellant buys that change at a brutal exchange rate (Tsiolkovsky), so spacecraft are designed around a Δv budget — and when the tank is empty the mission ends wherever you happen to be. Keep a logbook and you know before you light the engine whether the plan is affordable.</a:t>
             </a:r>
           </a:p>
         </p:txBody>
@@ -5314,7 +6988,7 @@
                 </a:solidFill>
                 <a:latin typeface="Arial"/>
               </a:rPr>
-              <a:t>Mission 2 — lead the Moon</a:t>
+              <a:t>Mission 1 — GEO servicing</a:t>
             </a:r>
           </a:p>
         </p:txBody>
@@ -5492,7 +7166,7 @@
                 </a:solidFill>
                 <a:latin typeface="Arial"/>
               </a:rPr>
-              <a:t>~120°</a:t>
+              <a:t>2,400 m/s</a:t>
             </a:r>
           </a:p>
           <a:p>
@@ -5504,7 +7178,7 @@
                 </a:solidFill>
                 <a:latin typeface="Arial"/>
               </a:rPr>
-              <a:t>lead angle — aim where the Moon WILL be</a:t>
+              <a:t>burn 1: raise apogee to GEO</a:t>
             </a:r>
           </a:p>
         </p:txBody>
@@ -5592,7 +7266,7 @@
                 </a:solidFill>
                 <a:latin typeface="Arial"/>
               </a:rPr>
-              <a:t>3,090 m/s</a:t>
+              <a:t>1,460 m/s</a:t>
             </a:r>
           </a:p>
           <a:p>
@@ -5604,7 +7278,7 @@
                 </a:solidFill>
                 <a:latin typeface="Arial"/>
               </a:rPr>
-              <a:t>the TLI burn out of low orbit</a:t>
+              <a:t>burn 2: circularize at apogee</a:t>
             </a:r>
           </a:p>
         </p:txBody>
@@ -5692,7 +7366,7 @@
                 </a:solidFill>
                 <a:latin typeface="Arial"/>
               </a:rPr>
-              <a:t>~4 days</a:t>
+              <a:t>3,860 / 6,500</a:t>
             </a:r>
           </a:p>
           <a:p>
@@ -5704,7 +7378,7 @@
                 </a:solidFill>
                 <a:latin typeface="Arial"/>
               </a:rPr>
-              <a:t>the coast — apogee aimed just PAST the Moon</a:t>
+              <a:t>planned burns vs the tank</a:t>
             </a:r>
           </a:p>
         </p:txBody>
@@ -5739,7 +7413,7 @@
                 </a:solidFill>
                 <a:latin typeface="Arial"/>
               </a:rPr>
-              <a:t>Aim for ~397,500 km — dead-center on the Moon is a collision, not a capture.</a:t>
+              <a:t>Circularizing hurts because you arrive at apogee doing only 1.6 km/s — and GEO demands 3.1. But reaching the belt is not the mission: you arrive ~8° BEHIND the target satellite and must phase in. Winning means holding within 3.5° of it for a full revolution.</a:t>
             </a:r>
           </a:p>
         </p:txBody>
@@ -5753,7 +7427,7 @@
 </file>
 
 <file path=ppt/slides/slide5.xml><?xml version="1.0" encoding="utf-8"?>
-<p:sld xmlns:a="http://schemas.openxmlformats.org/drawingml/2006/main" xmlns:r="http://schemas.openxmlformats.org/officeDocument/2006/relationships" xmlns:p="http://schemas.openxmlformats.org/presentationml/2006/main">
+<p:sld xmlns:a="http://schemas.openxmlformats.org/drawingml/2006/main" xmlns:p="http://schemas.openxmlformats.org/presentationml/2006/main" xmlns:r="http://schemas.openxmlformats.org/officeDocument/2006/relationships">
   <p:cSld>
     <p:bg>
       <p:bgPr>
@@ -5769,14 +7443,7 @@
         <p:cNvGrpSpPr/>
         <p:nvPr/>
       </p:nvGrpSpPr>
-      <p:grpSpPr>
-        <a:xfrm>
-          <a:off x="0" y="0"/>
-          <a:ext cx="0" cy="0"/>
-          <a:chOff x="0" y="0"/>
-          <a:chExt cx="0" cy="0"/>
-        </a:xfrm>
-      </p:grpSpPr>
+      <p:grpSpPr/>
       <p:sp>
         <p:nvSpPr>
           <p:cNvPr id="2" name="TextBox 1"/>
@@ -5821,7 +7488,7 @@
         <p:spPr>
           <a:xfrm>
             <a:off x="548640" y="676656"/>
-            <a:ext cx="10058400" cy="415498"/>
+            <a:ext cx="10058400" cy="640080"/>
           </a:xfrm>
           <a:prstGeom prst="rect">
             <a:avLst/>
@@ -5836,67 +7503,13 @@
           <a:p>
             <a:pPr algn="l"/>
             <a:r>
-              <a:rPr sz="2700" b="1" i="0" dirty="0">
+              <a:rPr sz="2700" b="1" i="0">
                 <a:solidFill>
                   <a:srgbClr val="5FD0FF"/>
                 </a:solidFill>
                 <a:latin typeface="Arial"/>
               </a:rPr>
-              <a:t>L</a:t>
-            </a:r>
-            <a:r>
-              <a:rPr lang="en-US" sz="2700" b="1" i="0" dirty="0">
-                <a:solidFill>
-                  <a:srgbClr val="5FD0FF"/>
-                </a:solidFill>
-                <a:latin typeface="Arial"/>
-              </a:rPr>
-              <a:t>unar </a:t>
-            </a:r>
-            <a:r>
-              <a:rPr sz="2700" b="1" i="0" dirty="0">
-                <a:solidFill>
-                  <a:srgbClr val="5FD0FF"/>
-                </a:solidFill>
-                <a:latin typeface="Arial"/>
-              </a:rPr>
-              <a:t>O</a:t>
-            </a:r>
-            <a:r>
-              <a:rPr lang="en-US" sz="2700" b="1" i="0" dirty="0">
-                <a:solidFill>
-                  <a:srgbClr val="5FD0FF"/>
-                </a:solidFill>
-                <a:latin typeface="Arial"/>
-              </a:rPr>
-              <a:t>rbit </a:t>
-            </a:r>
-            <a:r>
-              <a:rPr sz="2700" b="1" i="0" dirty="0">
-                <a:solidFill>
-                  <a:srgbClr val="5FD0FF"/>
-                </a:solidFill>
-                <a:latin typeface="Arial"/>
-              </a:rPr>
-              <a:t>I</a:t>
-            </a:r>
-            <a:r>
-              <a:rPr lang="en-US" sz="2700" b="1" i="0" dirty="0">
-                <a:solidFill>
-                  <a:srgbClr val="5FD0FF"/>
-                </a:solidFill>
-                <a:latin typeface="Arial"/>
-              </a:rPr>
-              <a:t>nsertion</a:t>
-            </a:r>
-            <a:r>
-              <a:rPr sz="2700" b="1" i="0" dirty="0">
-                <a:solidFill>
-                  <a:srgbClr val="5FD0FF"/>
-                </a:solidFill>
-                <a:latin typeface="Arial"/>
-              </a:rPr>
-              <a:t> — brake, backwards</a:t>
+              <a:t>To catch up, drop LOWER</a:t>
             </a:r>
           </a:p>
         </p:txBody>
@@ -5999,8 +7612,8 @@
         </p:nvSpPr>
         <p:spPr>
           <a:xfrm>
-            <a:off x="1363827" y="2148840"/>
-            <a:ext cx="4572000" cy="2148840"/>
+            <a:off x="495147" y="2148840"/>
+            <a:ext cx="3520440" cy="2148840"/>
           </a:xfrm>
           <a:prstGeom prst="roundRect">
             <a:avLst>
@@ -6048,8 +7661,8 @@
         </p:nvSpPr>
         <p:spPr>
           <a:xfrm>
-            <a:off x="1546707" y="2148840"/>
-            <a:ext cx="4206240" cy="2148840"/>
+            <a:off x="678027" y="2148840"/>
+            <a:ext cx="3154680" cy="2148840"/>
           </a:xfrm>
           <a:prstGeom prst="rect">
             <a:avLst/>
@@ -6074,7 +7687,7 @@
                 </a:solidFill>
                 <a:latin typeface="Arial"/>
               </a:rPr>
-              <a:t>900 m/s</a:t>
+              <a:t>SHORTER lap</a:t>
             </a:r>
           </a:p>
           <a:p>
@@ -6086,7 +7699,7 @@
                 </a:solidFill>
                 <a:latin typeface="Arial"/>
               </a:rPr>
-              <a:t>the capture burn — pointed REVERSE</a:t>
+              <a:t>a lower orbit has a shorter period</a:t>
             </a:r>
           </a:p>
         </p:txBody>
@@ -6099,8 +7712,8 @@
         </p:nvSpPr>
         <p:spPr>
           <a:xfrm>
-            <a:off x="6255867" y="2148840"/>
-            <a:ext cx="4572000" cy="2148840"/>
+            <a:off x="4335627" y="2148840"/>
+            <a:ext cx="3520440" cy="2148840"/>
           </a:xfrm>
           <a:prstGeom prst="roundRect">
             <a:avLst>
@@ -6148,8 +7761,8 @@
         </p:nvSpPr>
         <p:spPr>
           <a:xfrm>
-            <a:off x="6438747" y="2148840"/>
-            <a:ext cx="4206240" cy="2148840"/>
+            <a:off x="4518507" y="2148840"/>
+            <a:ext cx="3154680" cy="2148840"/>
           </a:xfrm>
           <a:prstGeom prst="rect">
             <a:avLst/>
@@ -6174,7 +7787,7 @@
                 </a:solidFill>
                 <a:latin typeface="Arial"/>
               </a:rPr>
-              <a:t>7,500 m/s</a:t>
+              <a:t>~5°/day</a:t>
             </a:r>
           </a:p>
           <a:p>
@@ -6186,14 +7799,114 @@
                 </a:solidFill>
                 <a:latin typeface="Arial"/>
               </a:rPr>
-              <a:t>the whole-mission Δv budget</a:t>
-            </a:r>
-          </a:p>
-        </p:txBody>
-      </p:sp>
-      <p:sp>
-        <p:nvSpPr>
-          <p:cNvPr id="10" name="TextBox 9"/>
+              <a:t>drift gained by dipping just 400 km</a:t>
+            </a:r>
+          </a:p>
+        </p:txBody>
+      </p:sp>
+      <p:sp>
+        <p:nvSpPr>
+          <p:cNvPr id="10" name="Rounded Rectangle 9"/>
+          <p:cNvSpPr/>
+          <p:nvPr/>
+        </p:nvSpPr>
+        <p:spPr>
+          <a:xfrm>
+            <a:off x="8176107" y="2148840"/>
+            <a:ext cx="3520440" cy="2148840"/>
+          </a:xfrm>
+          <a:prstGeom prst="roundRect">
+            <a:avLst>
+              <a:gd name="adj" fmla="val 7000"/>
+            </a:avLst>
+          </a:prstGeom>
+          <a:solidFill>
+            <a:srgbClr val="0A1830"/>
+          </a:solidFill>
+          <a:ln w="12700">
+            <a:solidFill>
+              <a:srgbClr val="1E3A5F"/>
+            </a:solidFill>
+          </a:ln>
+          <a:effectLst/>
+        </p:spPr>
+        <p:style>
+          <a:lnRef idx="1">
+            <a:schemeClr val="accent1"/>
+          </a:lnRef>
+          <a:fillRef idx="3">
+            <a:schemeClr val="accent1"/>
+          </a:fillRef>
+          <a:effectRef idx="2">
+            <a:schemeClr val="accent1"/>
+          </a:effectRef>
+          <a:fontRef idx="minor">
+            <a:schemeClr val="lt1"/>
+          </a:fontRef>
+        </p:style>
+        <p:txBody>
+          <a:bodyPr rtlCol="0" anchor="ctr"/>
+          <a:lstStyle/>
+          <a:p>
+            <a:pPr algn="ctr"/>
+            <a:endParaRPr/>
+          </a:p>
+        </p:txBody>
+      </p:sp>
+      <p:sp>
+        <p:nvSpPr>
+          <p:cNvPr id="11" name="TextBox 10"/>
+          <p:cNvSpPr txBox="1"/>
+          <p:nvPr/>
+        </p:nvSpPr>
+        <p:spPr>
+          <a:xfrm>
+            <a:off x="8358987" y="2148840"/>
+            <a:ext cx="3154680" cy="2148840"/>
+          </a:xfrm>
+          <a:prstGeom prst="rect">
+            <a:avLst/>
+          </a:prstGeom>
+          <a:noFill/>
+        </p:spPr>
+        <p:txBody>
+          <a:bodyPr wrap="square" lIns="0" tIns="0" rIns="0" bIns="0" anchor="ctr">
+            <a:spAutoFit/>
+          </a:bodyPr>
+          <a:lstStyle/>
+          <a:p>
+            <a:pPr algn="ctr">
+              <a:spcAft>
+                <a:spcPts val="800"/>
+              </a:spcAft>
+            </a:pPr>
+            <a:r>
+              <a:rPr sz="3300" b="1" i="0">
+                <a:solidFill>
+                  <a:srgbClr val="FFCF4D"/>
+                </a:solidFill>
+                <a:latin typeface="Arial"/>
+              </a:rPr>
+              <a:t>736 km</a:t>
+            </a:r>
+          </a:p>
+          <a:p>
+            <a:pPr algn="ctr"/>
+            <a:r>
+              <a:rPr sz="1250" b="0" i="0">
+                <a:solidFill>
+                  <a:srgbClr val="CFE3FF"/>
+                </a:solidFill>
+                <a:latin typeface="Arial"/>
+              </a:rPr>
+              <a:t>one degree along the GEO belt</a:t>
+            </a:r>
+          </a:p>
+        </p:txBody>
+      </p:sp>
+      <p:sp>
+        <p:nvSpPr>
+          <p:cNvPr id="12" name="TextBox 11"/>
           <p:cNvSpPr txBox="1"/>
           <p:nvPr/>
         </p:nvSpPr>
@@ -6221,7 +7934,7 @@
                 </a:solidFill>
                 <a:latin typeface="Arial"/>
               </a:rPr>
-              <a:t>At closest approach you are moving too fast for the Moon's gentle gravity to hold. Skip the brake and you sling right past, back into the void.</a:t>
+              <a:t>Chase a satellite ahead of you by burning FORWARD and you raise your orbit, LENGTHEN your period, and it pulls away. Burn REVERSE instead: you drop, your lap shortens, and you creep up on it — then burn FORWARD again to stop the drift. Your speed at the burn point actually falls; it is the PERIOD that wins the race.</a:t>
             </a:r>
           </a:p>
         </p:txBody>
@@ -6324,7 +8037,7 @@
                 </a:solidFill>
                 <a:latin typeface="Arial"/>
               </a:rPr>
-              <a:t>The cockpit</a:t>
+              <a:t>Mission 2 — lead the Moon</a:t>
             </a:r>
           </a:p>
         </p:txBody>
@@ -6421,24 +8134,26 @@
       </p:sp>
       <p:sp>
         <p:nvSpPr>
-          <p:cNvPr id="6" name="Oval 5"/>
+          <p:cNvPr id="6" name="Rounded Rectangle 5"/>
           <p:cNvSpPr/>
           <p:nvPr/>
         </p:nvSpPr>
         <p:spPr>
           <a:xfrm>
-            <a:off x="640080" y="1709928"/>
-            <a:ext cx="384048" cy="384048"/>
-          </a:xfrm>
-          <a:prstGeom prst="ellipse">
-            <a:avLst/>
+            <a:off x="495147" y="2148840"/>
+            <a:ext cx="3520440" cy="2148840"/>
+          </a:xfrm>
+          <a:prstGeom prst="roundRect">
+            <a:avLst>
+              <a:gd name="adj" fmla="val 7000"/>
+            </a:avLst>
           </a:prstGeom>
           <a:solidFill>
-            <a:srgbClr val="13294A"/>
+            <a:srgbClr val="0A1830"/>
           </a:solidFill>
           <a:ln w="12700">
             <a:solidFill>
-              <a:srgbClr val="FFCF4D"/>
+              <a:srgbClr val="1E3A5F"/>
             </a:solidFill>
           </a:ln>
           <a:effectLst/>
@@ -6458,19 +8173,11 @@
           </a:fontRef>
         </p:style>
         <p:txBody>
-          <a:bodyPr wrap="none" lIns="0" tIns="0" rIns="0" bIns="0" rtlCol="0" anchor="ctr"/>
+          <a:bodyPr rtlCol="0" anchor="ctr"/>
           <a:lstStyle/>
           <a:p>
             <a:pPr algn="ctr"/>
-            <a:r>
-              <a:rPr sz="1300" b="1" i="0">
-                <a:solidFill>
-                  <a:srgbClr val="FFCF4D"/>
-                </a:solidFill>
-                <a:latin typeface="Arial"/>
-              </a:rPr>
-              <a:t>1</a:t>
-            </a:r>
+            <a:endParaRPr/>
           </a:p>
         </p:txBody>
       </p:sp>
@@ -6482,8 +8189,8 @@
         </p:nvSpPr>
         <p:spPr>
           <a:xfrm>
-            <a:off x="1234440" y="1691640"/>
-            <a:ext cx="10332720" cy="960120"/>
+            <a:off x="678027" y="2148840"/>
+            <a:ext cx="3154680" cy="2148840"/>
           </a:xfrm>
           <a:prstGeom prst="rect">
             <a:avLst/>
@@ -6491,80 +8198,62 @@
           <a:noFill/>
         </p:spPr>
         <p:txBody>
-          <a:bodyPr wrap="square" lIns="0" tIns="0" rIns="0" bIns="0">
+          <a:bodyPr wrap="square" lIns="0" tIns="0" rIns="0" bIns="0" anchor="ctr">
             <a:spAutoFit/>
           </a:bodyPr>
           <a:lstStyle/>
           <a:p>
-            <a:pPr algn="l"/>
-            <a:r>
-              <a:rPr sz="1400" b="1" i="0" dirty="0">
-                <a:solidFill>
-                  <a:srgbClr val="EAF4FF"/>
-                </a:solidFill>
-                <a:latin typeface="Arial"/>
-              </a:rPr>
-              <a:t>PLAN mode</a:t>
-            </a:r>
-            <a:r>
-              <a:rPr sz="1300" b="0" i="0" dirty="0">
-                <a:solidFill>
-                  <a:srgbClr val="7E93B8"/>
-                </a:solidFill>
-                <a:latin typeface="Arial"/>
-              </a:rPr>
-              <a:t>  —  </a:t>
-            </a:r>
-            <a:r>
-              <a:rPr sz="1250" b="0" i="0" dirty="0">
+            <a:pPr algn="ctr">
+              <a:spcAft>
+                <a:spcPts val="800"/>
+              </a:spcAft>
+            </a:pPr>
+            <a:r>
+              <a:rPr sz="3300" b="1" i="0">
+                <a:solidFill>
+                  <a:srgbClr val="FFCF4D"/>
+                </a:solidFill>
+                <a:latin typeface="Arial"/>
+              </a:rPr>
+              <a:t>~120°</a:t>
+            </a:r>
+          </a:p>
+          <a:p>
+            <a:pPr algn="ctr"/>
+            <a:r>
+              <a:rPr sz="1250" b="0" i="0">
                 <a:solidFill>
                   <a:srgbClr val="CFE3FF"/>
                 </a:solidFill>
                 <a:latin typeface="Arial"/>
               </a:rPr>
-              <a:t>a flight computer: compute each burn's </a:t>
-            </a:r>
-            <a:r>
-              <a:rPr sz="1250" b="0" i="0" dirty="0" err="1">
-                <a:solidFill>
-                  <a:srgbClr val="CFE3FF"/>
-                </a:solidFill>
-                <a:latin typeface="Arial"/>
-              </a:rPr>
-              <a:t>Δv</a:t>
-            </a:r>
-            <a:r>
-              <a:rPr sz="1250" b="0" i="0" dirty="0">
-                <a:solidFill>
-                  <a:srgbClr val="CFE3FF"/>
-                </a:solidFill>
-                <a:latin typeface="Arial"/>
-              </a:rPr>
-              <a:t>, log it, run the predictor</a:t>
-            </a:r>
-          </a:p>
-        </p:txBody>
-      </p:sp>
-      <p:sp>
-        <p:nvSpPr>
-          <p:cNvPr id="8" name="Oval 7"/>
+              <a:t>lead angle — aim where the Moon WILL be</a:t>
+            </a:r>
+          </a:p>
+        </p:txBody>
+      </p:sp>
+      <p:sp>
+        <p:nvSpPr>
+          <p:cNvPr id="8" name="Rounded Rectangle 7"/>
           <p:cNvSpPr/>
           <p:nvPr/>
         </p:nvSpPr>
         <p:spPr>
           <a:xfrm>
-            <a:off x="640080" y="2670048"/>
-            <a:ext cx="384048" cy="384048"/>
-          </a:xfrm>
-          <a:prstGeom prst="ellipse">
-            <a:avLst/>
+            <a:off x="4335627" y="2148840"/>
+            <a:ext cx="3520440" cy="2148840"/>
+          </a:xfrm>
+          <a:prstGeom prst="roundRect">
+            <a:avLst>
+              <a:gd name="adj" fmla="val 7000"/>
+            </a:avLst>
           </a:prstGeom>
           <a:solidFill>
-            <a:srgbClr val="13294A"/>
+            <a:srgbClr val="0A1830"/>
           </a:solidFill>
           <a:ln w="12700">
             <a:solidFill>
-              <a:srgbClr val="FFCF4D"/>
+              <a:srgbClr val="1E3A5F"/>
             </a:solidFill>
           </a:ln>
           <a:effectLst/>
@@ -6584,19 +8273,11 @@
           </a:fontRef>
         </p:style>
         <p:txBody>
-          <a:bodyPr wrap="none" lIns="0" tIns="0" rIns="0" bIns="0" rtlCol="0" anchor="ctr"/>
+          <a:bodyPr rtlCol="0" anchor="ctr"/>
           <a:lstStyle/>
           <a:p>
             <a:pPr algn="ctr"/>
-            <a:r>
-              <a:rPr sz="1300" b="1" i="0">
-                <a:solidFill>
-                  <a:srgbClr val="FFCF4D"/>
-                </a:solidFill>
-                <a:latin typeface="Arial"/>
-              </a:rPr>
-              <a:t>2</a:t>
-            </a:r>
+            <a:endParaRPr/>
           </a:p>
         </p:txBody>
       </p:sp>
@@ -6608,8 +8289,8 @@
         </p:nvSpPr>
         <p:spPr>
           <a:xfrm>
-            <a:off x="1234440" y="2651760"/>
-            <a:ext cx="10332720" cy="960120"/>
+            <a:off x="4518507" y="2148840"/>
+            <a:ext cx="3154680" cy="2148840"/>
           </a:xfrm>
           <a:prstGeom prst="rect">
             <a:avLst/>
@@ -6617,30 +8298,28 @@
           <a:noFill/>
         </p:spPr>
         <p:txBody>
-          <a:bodyPr wrap="square" lIns="0" tIns="0" rIns="0" bIns="0">
+          <a:bodyPr wrap="square" lIns="0" tIns="0" rIns="0" bIns="0" anchor="ctr">
             <a:spAutoFit/>
           </a:bodyPr>
           <a:lstStyle/>
           <a:p>
-            <a:pPr algn="l"/>
-            <a:r>
-              <a:rPr sz="1400" b="1" i="0">
-                <a:solidFill>
-                  <a:srgbClr val="EAF4FF"/>
-                </a:solidFill>
-                <a:latin typeface="Arial"/>
-              </a:rPr>
-              <a:t>FLY mode</a:t>
-            </a:r>
-            <a:r>
-              <a:rPr sz="1300" b="0" i="0">
-                <a:solidFill>
-                  <a:srgbClr val="7E93B8"/>
-                </a:solidFill>
-                <a:latin typeface="Arial"/>
-              </a:rPr>
-              <a:t>  —  </a:t>
-            </a:r>
+            <a:pPr algn="ctr">
+              <a:spcAft>
+                <a:spcPts val="800"/>
+              </a:spcAft>
+            </a:pPr>
+            <a:r>
+              <a:rPr sz="3300" b="1" i="0">
+                <a:solidFill>
+                  <a:srgbClr val="FFCF4D"/>
+                </a:solidFill>
+                <a:latin typeface="Arial"/>
+              </a:rPr>
+              <a:t>3,090 m/s</a:t>
+            </a:r>
+          </a:p>
+          <a:p>
+            <a:pPr algn="ctr"/>
             <a:r>
               <a:rPr sz="1250" b="0" i="0">
                 <a:solidFill>
@@ -6648,31 +8327,33 @@
                 </a:solidFill>
                 <a:latin typeface="Arial"/>
               </a:rPr>
-              <a:t>Earth and Moon out the window at true angular size; hold-to-thrust controls</a:t>
-            </a:r>
-          </a:p>
-        </p:txBody>
-      </p:sp>
-      <p:sp>
-        <p:nvSpPr>
-          <p:cNvPr id="10" name="Oval 9"/>
+              <a:t>the TLI burn out of low orbit</a:t>
+            </a:r>
+          </a:p>
+        </p:txBody>
+      </p:sp>
+      <p:sp>
+        <p:nvSpPr>
+          <p:cNvPr id="10" name="Rounded Rectangle 9"/>
           <p:cNvSpPr/>
           <p:nvPr/>
         </p:nvSpPr>
         <p:spPr>
           <a:xfrm>
-            <a:off x="640080" y="3630168"/>
-            <a:ext cx="384048" cy="384048"/>
-          </a:xfrm>
-          <a:prstGeom prst="ellipse">
-            <a:avLst/>
+            <a:off x="8176107" y="2148840"/>
+            <a:ext cx="3520440" cy="2148840"/>
+          </a:xfrm>
+          <a:prstGeom prst="roundRect">
+            <a:avLst>
+              <a:gd name="adj" fmla="val 7000"/>
+            </a:avLst>
           </a:prstGeom>
           <a:solidFill>
-            <a:srgbClr val="13294A"/>
+            <a:srgbClr val="0A1830"/>
           </a:solidFill>
           <a:ln w="12700">
             <a:solidFill>
-              <a:srgbClr val="FFCF4D"/>
+              <a:srgbClr val="1E3A5F"/>
             </a:solidFill>
           </a:ln>
           <a:effectLst/>
@@ -6692,19 +8373,11 @@
           </a:fontRef>
         </p:style>
         <p:txBody>
-          <a:bodyPr wrap="none" lIns="0" tIns="0" rIns="0" bIns="0" rtlCol="0" anchor="ctr"/>
+          <a:bodyPr rtlCol="0" anchor="ctr"/>
           <a:lstStyle/>
           <a:p>
             <a:pPr algn="ctr"/>
-            <a:r>
-              <a:rPr sz="1300" b="1" i="0">
-                <a:solidFill>
-                  <a:srgbClr val="FFCF4D"/>
-                </a:solidFill>
-                <a:latin typeface="Arial"/>
-              </a:rPr>
-              <a:t>3</a:t>
-            </a:r>
+            <a:endParaRPr/>
           </a:p>
         </p:txBody>
       </p:sp>
@@ -6716,8 +8389,59 @@
         </p:nvSpPr>
         <p:spPr>
           <a:xfrm>
-            <a:off x="1234440" y="3611880"/>
-            <a:ext cx="10332720" cy="960120"/>
+            <a:off x="8358987" y="2148840"/>
+            <a:ext cx="3154680" cy="2148840"/>
+          </a:xfrm>
+          <a:prstGeom prst="rect">
+            <a:avLst/>
+          </a:prstGeom>
+          <a:noFill/>
+        </p:spPr>
+        <p:txBody>
+          <a:bodyPr wrap="square" lIns="0" tIns="0" rIns="0" bIns="0" anchor="ctr">
+            <a:spAutoFit/>
+          </a:bodyPr>
+          <a:lstStyle/>
+          <a:p>
+            <a:pPr algn="ctr">
+              <a:spcAft>
+                <a:spcPts val="800"/>
+              </a:spcAft>
+            </a:pPr>
+            <a:r>
+              <a:rPr sz="3300" b="1" i="0">
+                <a:solidFill>
+                  <a:srgbClr val="FFCF4D"/>
+                </a:solidFill>
+                <a:latin typeface="Arial"/>
+              </a:rPr>
+              <a:t>~4 days</a:t>
+            </a:r>
+          </a:p>
+          <a:p>
+            <a:pPr algn="ctr"/>
+            <a:r>
+              <a:rPr sz="1250" b="0" i="0">
+                <a:solidFill>
+                  <a:srgbClr val="CFE3FF"/>
+                </a:solidFill>
+                <a:latin typeface="Arial"/>
+              </a:rPr>
+              <a:t>the coast — apogee aimed just PAST the Moon</a:t>
+            </a:r>
+          </a:p>
+        </p:txBody>
+      </p:sp>
+      <p:sp>
+        <p:nvSpPr>
+          <p:cNvPr id="12" name="TextBox 11"/>
+          <p:cNvSpPr txBox="1"/>
+          <p:nvPr/>
+        </p:nvSpPr>
+        <p:spPr>
+          <a:xfrm>
+            <a:off x="548640" y="4709160"/>
+            <a:ext cx="11064240" cy="1280160"/>
           </a:xfrm>
           <a:prstGeom prst="rect">
             <a:avLst/>
@@ -6732,139 +8456,13 @@
           <a:p>
             <a:pPr algn="l"/>
             <a:r>
-              <a:rPr sz="1400" b="1" i="0">
-                <a:solidFill>
-                  <a:srgbClr val="EAF4FF"/>
-                </a:solidFill>
-                <a:latin typeface="Arial"/>
-              </a:rPr>
-              <a:t>BURN NOW</a:t>
-            </a:r>
-            <a:r>
-              <a:rPr sz="1300" b="0" i="0">
-                <a:solidFill>
-                  <a:srgbClr val="7E93B8"/>
-                </a:solidFill>
-                <a:latin typeface="Arial"/>
-              </a:rPr>
-              <a:t>  —  </a:t>
-            </a:r>
-            <a:r>
-              <a:rPr sz="1250" b="0" i="0">
+              <a:rPr sz="1350" b="0" i="1">
                 <a:solidFill>
                   <a:srgbClr val="CFE3FF"/>
                 </a:solidFill>
                 <a:latin typeface="Arial"/>
               </a:rPr>
-              <a:t>the cue light — hold the right thruster to the logged Δv, no more</a:t>
-            </a:r>
-          </a:p>
-        </p:txBody>
-      </p:sp>
-      <p:sp>
-        <p:nvSpPr>
-          <p:cNvPr id="12" name="Oval 11"/>
-          <p:cNvSpPr/>
-          <p:nvPr/>
-        </p:nvSpPr>
-        <p:spPr>
-          <a:xfrm>
-            <a:off x="640080" y="4590288"/>
-            <a:ext cx="384048" cy="384048"/>
-          </a:xfrm>
-          <a:prstGeom prst="ellipse">
-            <a:avLst/>
-          </a:prstGeom>
-          <a:solidFill>
-            <a:srgbClr val="13294A"/>
-          </a:solidFill>
-          <a:ln w="12700">
-            <a:solidFill>
-              <a:srgbClr val="FFCF4D"/>
-            </a:solidFill>
-          </a:ln>
-          <a:effectLst/>
-        </p:spPr>
-        <p:style>
-          <a:lnRef idx="1">
-            <a:schemeClr val="accent1"/>
-          </a:lnRef>
-          <a:fillRef idx="3">
-            <a:schemeClr val="accent1"/>
-          </a:fillRef>
-          <a:effectRef idx="2">
-            <a:schemeClr val="accent1"/>
-          </a:effectRef>
-          <a:fontRef idx="minor">
-            <a:schemeClr val="lt1"/>
-          </a:fontRef>
-        </p:style>
-        <p:txBody>
-          <a:bodyPr wrap="none" lIns="0" tIns="0" rIns="0" bIns="0" rtlCol="0" anchor="ctr"/>
-          <a:lstStyle/>
-          <a:p>
-            <a:pPr algn="ctr"/>
-            <a:r>
-              <a:rPr sz="1300" b="1" i="0">
-                <a:solidFill>
-                  <a:srgbClr val="FFCF4D"/>
-                </a:solidFill>
-                <a:latin typeface="Arial"/>
-              </a:rPr>
-              <a:t>4</a:t>
-            </a:r>
-          </a:p>
-        </p:txBody>
-      </p:sp>
-      <p:sp>
-        <p:nvSpPr>
-          <p:cNvPr id="13" name="TextBox 12"/>
-          <p:cNvSpPr txBox="1"/>
-          <p:nvPr/>
-        </p:nvSpPr>
-        <p:spPr>
-          <a:xfrm>
-            <a:off x="1234440" y="4572000"/>
-            <a:ext cx="10332720" cy="960120"/>
-          </a:xfrm>
-          <a:prstGeom prst="rect">
-            <a:avLst/>
-          </a:prstGeom>
-          <a:noFill/>
-        </p:spPr>
-        <p:txBody>
-          <a:bodyPr wrap="square" lIns="0" tIns="0" rIns="0" bIns="0">
-            <a:spAutoFit/>
-          </a:bodyPr>
-          <a:lstStyle/>
-          <a:p>
-            <a:pPr algn="l"/>
-            <a:r>
-              <a:rPr sz="1400" b="1" i="0">
-                <a:solidFill>
-                  <a:srgbClr val="EAF4FF"/>
-                </a:solidFill>
-                <a:latin typeface="Arial"/>
-              </a:rPr>
-              <a:t>ILS needles</a:t>
-            </a:r>
-            <a:r>
-              <a:rPr sz="1300" b="0" i="0">
-                <a:solidFill>
-                  <a:srgbClr val="7E93B8"/>
-                </a:solidFill>
-                <a:latin typeface="Arial"/>
-              </a:rPr>
-              <a:t>  —  </a:t>
-            </a:r>
-            <a:r>
-              <a:rPr sz="1250" b="0" i="0">
-                <a:solidFill>
-                  <a:srgbClr val="CFE3FF"/>
-                </a:solidFill>
-                <a:latin typeface="Arial"/>
-              </a:rPr>
-              <a:t>on-track and on-speed indicators, borrowed from aviation</a:t>
+              <a:t>Aim for ~395,000 km — dead-centre on the Moon is a collision, not a capture. And TLI is a knife edge: ±1.5 m/s out of 3,090 flips a clean capture into an impact or a miss.</a:t>
             </a:r>
           </a:p>
         </p:txBody>
@@ -6946,7 +8544,7 @@
         <p:spPr>
           <a:xfrm>
             <a:off x="548640" y="676656"/>
-            <a:ext cx="10058400" cy="640080"/>
+            <a:ext cx="10058400" cy="415498"/>
           </a:xfrm>
           <a:prstGeom prst="rect">
             <a:avLst/>
@@ -6961,13 +8559,67 @@
           <a:p>
             <a:pPr algn="l"/>
             <a:r>
-              <a:rPr sz="2700" b="1" i="0">
+              <a:rPr sz="2700" b="1" i="0" dirty="0">
                 <a:solidFill>
                   <a:srgbClr val="5FD0FF"/>
                 </a:solidFill>
                 <a:latin typeface="Arial"/>
               </a:rPr>
-              <a:t>What you'll do</a:t>
+              <a:t>L</a:t>
+            </a:r>
+            <a:r>
+              <a:rPr lang="en-US" sz="2700" b="1" i="0" dirty="0">
+                <a:solidFill>
+                  <a:srgbClr val="5FD0FF"/>
+                </a:solidFill>
+                <a:latin typeface="Arial"/>
+              </a:rPr>
+              <a:t>unar </a:t>
+            </a:r>
+            <a:r>
+              <a:rPr sz="2700" b="1" i="0" dirty="0">
+                <a:solidFill>
+                  <a:srgbClr val="5FD0FF"/>
+                </a:solidFill>
+                <a:latin typeface="Arial"/>
+              </a:rPr>
+              <a:t>O</a:t>
+            </a:r>
+            <a:r>
+              <a:rPr lang="en-US" sz="2700" b="1" i="0" dirty="0">
+                <a:solidFill>
+                  <a:srgbClr val="5FD0FF"/>
+                </a:solidFill>
+                <a:latin typeface="Arial"/>
+              </a:rPr>
+              <a:t>rbit </a:t>
+            </a:r>
+            <a:r>
+              <a:rPr sz="2700" b="1" i="0" dirty="0">
+                <a:solidFill>
+                  <a:srgbClr val="5FD0FF"/>
+                </a:solidFill>
+                <a:latin typeface="Arial"/>
+              </a:rPr>
+              <a:t>I</a:t>
+            </a:r>
+            <a:r>
+              <a:rPr lang="en-US" sz="2700" b="1" i="0" dirty="0">
+                <a:solidFill>
+                  <a:srgbClr val="5FD0FF"/>
+                </a:solidFill>
+                <a:latin typeface="Arial"/>
+              </a:rPr>
+              <a:t>nsertion</a:t>
+            </a:r>
+            <a:r>
+              <a:rPr sz="2700" b="1" i="0" dirty="0">
+                <a:solidFill>
+                  <a:srgbClr val="5FD0FF"/>
+                </a:solidFill>
+                <a:latin typeface="Arial"/>
+              </a:rPr>
+              <a:t> — brake, backwards</a:t>
             </a:r>
           </a:p>
         </p:txBody>
@@ -7070,8 +8722,8 @@
         </p:nvSpPr>
         <p:spPr>
           <a:xfrm>
-            <a:off x="548640" y="1645920"/>
-            <a:ext cx="2834640" cy="960120"/>
+            <a:off x="1363827" y="2148840"/>
+            <a:ext cx="4572000" cy="2148840"/>
           </a:xfrm>
           <a:prstGeom prst="roundRect">
             <a:avLst>
@@ -7119,8 +8771,8 @@
         </p:nvSpPr>
         <p:spPr>
           <a:xfrm>
-            <a:off x="777240" y="1645920"/>
-            <a:ext cx="2377440" cy="960120"/>
+            <a:off x="1546707" y="2148840"/>
+            <a:ext cx="4206240" cy="2148840"/>
           </a:xfrm>
           <a:prstGeom prst="rect">
             <a:avLst/>
@@ -7133,80 +8785,45 @@
           </a:bodyPr>
           <a:lstStyle/>
           <a:p>
-            <a:pPr algn="l">
+            <a:pPr algn="ctr">
               <a:spcAft>
-                <a:spcPts val="300"/>
+                <a:spcPts val="800"/>
               </a:spcAft>
             </a:pPr>
             <a:r>
-              <a:rPr sz="1500" b="1" i="0">
-                <a:solidFill>
-                  <a:srgbClr val="39D353"/>
-                </a:solidFill>
-                <a:latin typeface="Arial"/>
-              </a:rPr>
-              <a:t>PREDICT</a:t>
-            </a:r>
-          </a:p>
-          <a:p>
-            <a:pPr algn="l"/>
-            <a:r>
-              <a:rPr sz="1050" b="0" i="0">
-                <a:solidFill>
-                  <a:srgbClr val="7E93B8"/>
-                </a:solidFill>
-                <a:latin typeface="Arial"/>
-              </a:rPr>
-              <a:t>call your shot first</a:t>
-            </a:r>
-          </a:p>
-        </p:txBody>
-      </p:sp>
-      <p:sp>
-        <p:nvSpPr>
-          <p:cNvPr id="8" name="TextBox 7"/>
-          <p:cNvSpPr txBox="1"/>
-          <p:nvPr/>
-        </p:nvSpPr>
-        <p:spPr>
-          <a:xfrm>
-            <a:off x="3401568" y="1810512"/>
-            <a:ext cx="411480" cy="548640"/>
-          </a:xfrm>
-          <a:prstGeom prst="rect">
-            <a:avLst/>
-          </a:prstGeom>
-          <a:noFill/>
-        </p:spPr>
-        <p:txBody>
-          <a:bodyPr wrap="square" lIns="0" tIns="0" rIns="0" bIns="0">
-            <a:spAutoFit/>
-          </a:bodyPr>
-          <a:lstStyle/>
+              <a:rPr sz="3300" b="1" i="0">
+                <a:solidFill>
+                  <a:srgbClr val="FFCF4D"/>
+                </a:solidFill>
+                <a:latin typeface="Arial"/>
+              </a:rPr>
+              <a:t>~600 m/s</a:t>
+            </a:r>
+          </a:p>
           <a:p>
             <a:pPr algn="ctr"/>
             <a:r>
-              <a:rPr sz="2200" b="1" i="0">
-                <a:solidFill>
-                  <a:srgbClr val="FFCF4D"/>
-                </a:solidFill>
-                <a:latin typeface="Arial"/>
-              </a:rPr>
-              <a:t>→</a:t>
-            </a:r>
-          </a:p>
-        </p:txBody>
-      </p:sp>
-      <p:sp>
-        <p:nvSpPr>
-          <p:cNvPr id="9" name="Rounded Rectangle 8"/>
+              <a:rPr sz="1250" b="0" i="0">
+                <a:solidFill>
+                  <a:srgbClr val="CFE3FF"/>
+                </a:solidFill>
+                <a:latin typeface="Arial"/>
+              </a:rPr>
+              <a:t>the brake — REVERSE, at closest approach</a:t>
+            </a:r>
+          </a:p>
+        </p:txBody>
+      </p:sp>
+      <p:sp>
+        <p:nvSpPr>
+          <p:cNvPr id="8" name="Rounded Rectangle 7"/>
           <p:cNvSpPr/>
           <p:nvPr/>
         </p:nvSpPr>
         <p:spPr>
           <a:xfrm>
-            <a:off x="3794759" y="1645920"/>
-            <a:ext cx="2834640" cy="960120"/>
+            <a:off x="6255867" y="2148840"/>
+            <a:ext cx="4572000" cy="2148840"/>
           </a:xfrm>
           <a:prstGeom prst="roundRect">
             <a:avLst>
@@ -7248,14 +8865,14 @@
       </p:sp>
       <p:sp>
         <p:nvSpPr>
-          <p:cNvPr id="10" name="TextBox 9"/>
+          <p:cNvPr id="9" name="TextBox 8"/>
           <p:cNvSpPr txBox="1"/>
           <p:nvPr/>
         </p:nvSpPr>
         <p:spPr>
           <a:xfrm>
-            <a:off x="4023359" y="1645920"/>
-            <a:ext cx="2377440" cy="960120"/>
+            <a:off x="6438747" y="2148840"/>
+            <a:ext cx="4206240" cy="2148840"/>
           </a:xfrm>
           <a:prstGeom prst="rect">
             <a:avLst/>
@@ -7268,45 +8885,45 @@
           </a:bodyPr>
           <a:lstStyle/>
           <a:p>
-            <a:pPr algn="l">
+            <a:pPr algn="ctr">
               <a:spcAft>
-                <a:spcPts val="300"/>
+                <a:spcPts val="800"/>
               </a:spcAft>
             </a:pPr>
             <a:r>
-              <a:rPr sz="1500" b="1" i="0">
-                <a:solidFill>
-                  <a:srgbClr val="39D353"/>
-                </a:solidFill>
-                <a:latin typeface="Arial"/>
-              </a:rPr>
-              <a:t>TRY</a:t>
-            </a:r>
-          </a:p>
-          <a:p>
-            <a:pPr algn="l"/>
-            <a:r>
-              <a:rPr sz="1050" b="0" i="0">
-                <a:solidFill>
-                  <a:srgbClr val="7E93B8"/>
-                </a:solidFill>
-                <a:latin typeface="Arial"/>
-              </a:rPr>
-              <a:t>run it in the simulator</a:t>
-            </a:r>
-          </a:p>
-        </p:txBody>
-      </p:sp>
-      <p:sp>
-        <p:nvSpPr>
-          <p:cNvPr id="11" name="TextBox 10"/>
+              <a:rPr sz="3300" b="1" i="0">
+                <a:solidFill>
+                  <a:srgbClr val="FFCF4D"/>
+                </a:solidFill>
+                <a:latin typeface="Arial"/>
+              </a:rPr>
+              <a:t>9,500 m/s</a:t>
+            </a:r>
+          </a:p>
+          <a:p>
+            <a:pPr algn="ctr"/>
+            <a:r>
+              <a:rPr sz="1250" b="0" i="0">
+                <a:solidFill>
+                  <a:srgbClr val="CFE3FF"/>
+                </a:solidFill>
+                <a:latin typeface="Arial"/>
+              </a:rPr>
+              <a:t>the whole-mission Δv budget</a:t>
+            </a:r>
+          </a:p>
+        </p:txBody>
+      </p:sp>
+      <p:sp>
+        <p:nvSpPr>
+          <p:cNvPr id="10" name="TextBox 9"/>
           <p:cNvSpPr txBox="1"/>
           <p:nvPr/>
         </p:nvSpPr>
         <p:spPr>
           <a:xfrm>
-            <a:off x="6647688" y="1810512"/>
-            <a:ext cx="411480" cy="548640"/>
+            <a:off x="548640" y="4709160"/>
+            <a:ext cx="11064240" cy="1280160"/>
           </a:xfrm>
           <a:prstGeom prst="rect">
             <a:avLst/>
@@ -7319,29 +8936,215 @@
           </a:bodyPr>
           <a:lstStyle/>
           <a:p>
+            <a:pPr algn="l"/>
+            <a:r>
+              <a:rPr sz="1350" b="0" i="1">
+                <a:solidFill>
+                  <a:srgbClr val="CFE3FF"/>
+                </a:solidFill>
+                <a:latin typeface="Arial"/>
+              </a:rPr>
+              <a:t>At closest approach you are moving too fast for the Moon's gentle gravity to hold. Skip the brake and you sling right past. Brake to the local circular speed (~600 m/s — less than the 900 you planned) and capture costs you least. Capture leaves an ELLIPSE, so a third burn rounds it out at an apsis: TLI, brake, circularize.</a:t>
+            </a:r>
+          </a:p>
+        </p:txBody>
+      </p:sp>
+    </p:spTree>
+  </p:cSld>
+  <p:clrMapOvr>
+    <a:masterClrMapping/>
+  </p:clrMapOvr>
+</p:sld>
+</file>
+
+<file path=ppt/slides/slide8.xml><?xml version="1.0" encoding="utf-8"?>
+<p:sld xmlns:a="http://schemas.openxmlformats.org/drawingml/2006/main" xmlns:p="http://schemas.openxmlformats.org/presentationml/2006/main" xmlns:r="http://schemas.openxmlformats.org/officeDocument/2006/relationships">
+  <p:cSld>
+    <p:bg>
+      <p:bgPr>
+        <a:solidFill>
+          <a:srgbClr val="050A14"/>
+        </a:solidFill>
+        <a:effectLst/>
+      </p:bgPr>
+    </p:bg>
+    <p:spTree>
+      <p:nvGrpSpPr>
+        <p:cNvPr id="1" name=""/>
+        <p:cNvGrpSpPr/>
+        <p:nvPr/>
+      </p:nvGrpSpPr>
+      <p:grpSpPr/>
+      <p:sp>
+        <p:nvSpPr>
+          <p:cNvPr id="2" name="TextBox 1"/>
+          <p:cNvSpPr txBox="1"/>
+          <p:nvPr/>
+        </p:nvSpPr>
+        <p:spPr>
+          <a:xfrm>
+            <a:off x="548640" y="384048"/>
+            <a:ext cx="8686800" cy="292608"/>
+          </a:xfrm>
+          <a:prstGeom prst="rect">
+            <a:avLst/>
+          </a:prstGeom>
+          <a:noFill/>
+        </p:spPr>
+        <p:txBody>
+          <a:bodyPr wrap="square" lIns="0" tIns="0" rIns="0" bIns="0">
+            <a:spAutoFit/>
+          </a:bodyPr>
+          <a:lstStyle/>
+          <a:p>
+            <a:pPr algn="l"/>
+            <a:r>
+              <a:rPr sz="1100" b="1" i="0">
+                <a:solidFill>
+                  <a:srgbClr val="FFCF4D"/>
+                </a:solidFill>
+                <a:latin typeface="Arial"/>
+              </a:rPr>
+              <a:t>MODULE 8 · ORBIT ACADEMY</a:t>
+            </a:r>
+          </a:p>
+        </p:txBody>
+      </p:sp>
+      <p:sp>
+        <p:nvSpPr>
+          <p:cNvPr id="3" name="TextBox 2"/>
+          <p:cNvSpPr txBox="1"/>
+          <p:nvPr/>
+        </p:nvSpPr>
+        <p:spPr>
+          <a:xfrm>
+            <a:off x="548640" y="676656"/>
+            <a:ext cx="10058400" cy="640080"/>
+          </a:xfrm>
+          <a:prstGeom prst="rect">
+            <a:avLst/>
+          </a:prstGeom>
+          <a:noFill/>
+        </p:spPr>
+        <p:txBody>
+          <a:bodyPr wrap="square" lIns="0" tIns="0" rIns="0" bIns="0">
+            <a:spAutoFit/>
+          </a:bodyPr>
+          <a:lstStyle/>
+          <a:p>
+            <a:pPr algn="l"/>
+            <a:r>
+              <a:rPr sz="2700" b="1" i="0">
+                <a:solidFill>
+                  <a:srgbClr val="5FD0FF"/>
+                </a:solidFill>
+                <a:latin typeface="Arial"/>
+              </a:rPr>
+              <a:t>Circularize only at an apsis</a:t>
+            </a:r>
+          </a:p>
+        </p:txBody>
+      </p:sp>
+      <p:sp>
+        <p:nvSpPr>
+          <p:cNvPr id="4" name="Oval 3"/>
+          <p:cNvSpPr/>
+          <p:nvPr/>
+        </p:nvSpPr>
+        <p:spPr>
+          <a:xfrm>
+            <a:off x="10835640" y="484632"/>
+            <a:ext cx="914400" cy="347472"/>
+          </a:xfrm>
+          <a:prstGeom prst="ellipse">
+            <a:avLst/>
+          </a:prstGeom>
+          <a:noFill/>
+          <a:ln w="12700">
+            <a:solidFill>
+              <a:srgbClr val="2A4A74"/>
+            </a:solidFill>
+          </a:ln>
+          <a:effectLst/>
+        </p:spPr>
+        <p:style>
+          <a:lnRef idx="1">
+            <a:schemeClr val="accent1"/>
+          </a:lnRef>
+          <a:fillRef idx="3">
+            <a:schemeClr val="accent1"/>
+          </a:fillRef>
+          <a:effectRef idx="2">
+            <a:schemeClr val="accent1"/>
+          </a:effectRef>
+          <a:fontRef idx="minor">
+            <a:schemeClr val="lt1"/>
+          </a:fontRef>
+        </p:style>
+        <p:txBody>
+          <a:bodyPr rtlCol="0" anchor="ctr"/>
+          <a:lstStyle/>
+          <a:p>
             <a:pPr algn="ctr"/>
-            <a:r>
-              <a:rPr sz="2200" b="1" i="0">
-                <a:solidFill>
-                  <a:srgbClr val="FFCF4D"/>
-                </a:solidFill>
-                <a:latin typeface="Arial"/>
-              </a:rPr>
-              <a:t>→</a:t>
-            </a:r>
-          </a:p>
-        </p:txBody>
-      </p:sp>
-      <p:sp>
-        <p:nvSpPr>
-          <p:cNvPr id="12" name="Rounded Rectangle 11"/>
+            <a:endParaRPr/>
+          </a:p>
+        </p:txBody>
+      </p:sp>
+      <p:sp>
+        <p:nvSpPr>
+          <p:cNvPr id="5" name="Oval 4"/>
           <p:cNvSpPr/>
           <p:nvPr/>
         </p:nvSpPr>
         <p:spPr>
           <a:xfrm>
-            <a:off x="7040879" y="1645920"/>
-            <a:ext cx="2834640" cy="960120"/>
+            <a:off x="11708892" y="617219"/>
+            <a:ext cx="82296" cy="82296"/>
+          </a:xfrm>
+          <a:prstGeom prst="ellipse">
+            <a:avLst/>
+          </a:prstGeom>
+          <a:solidFill>
+            <a:srgbClr val="FFCF4D"/>
+          </a:solidFill>
+          <a:ln>
+            <a:noFill/>
+          </a:ln>
+          <a:effectLst/>
+        </p:spPr>
+        <p:style>
+          <a:lnRef idx="1">
+            <a:schemeClr val="accent1"/>
+          </a:lnRef>
+          <a:fillRef idx="3">
+            <a:schemeClr val="accent1"/>
+          </a:fillRef>
+          <a:effectRef idx="2">
+            <a:schemeClr val="accent1"/>
+          </a:effectRef>
+          <a:fontRef idx="minor">
+            <a:schemeClr val="lt1"/>
+          </a:fontRef>
+        </p:style>
+        <p:txBody>
+          <a:bodyPr rtlCol="0" anchor="ctr"/>
+          <a:lstStyle/>
+          <a:p>
+            <a:pPr algn="ctr"/>
+            <a:endParaRPr/>
+          </a:p>
+        </p:txBody>
+      </p:sp>
+      <p:sp>
+        <p:nvSpPr>
+          <p:cNvPr id="6" name="Rounded Rectangle 5"/>
+          <p:cNvSpPr/>
+          <p:nvPr/>
+        </p:nvSpPr>
+        <p:spPr>
+          <a:xfrm>
+            <a:off x="495147" y="2148840"/>
+            <a:ext cx="3520440" cy="2148840"/>
           </a:xfrm>
           <a:prstGeom prst="roundRect">
             <a:avLst>
@@ -7383,14 +9186,14 @@
       </p:sp>
       <p:sp>
         <p:nvSpPr>
-          <p:cNvPr id="13" name="TextBox 12"/>
+          <p:cNvPr id="7" name="TextBox 6"/>
           <p:cNvSpPr txBox="1"/>
           <p:nvPr/>
         </p:nvSpPr>
         <p:spPr>
           <a:xfrm>
-            <a:off x="7269479" y="1645920"/>
-            <a:ext cx="2377440" cy="960120"/>
+            <a:off x="678027" y="2148840"/>
+            <a:ext cx="3154680" cy="2148840"/>
           </a:xfrm>
           <a:prstGeom prst="rect">
             <a:avLst/>
@@ -7403,54 +9206,58 @@
           </a:bodyPr>
           <a:lstStyle/>
           <a:p>
-            <a:pPr algn="l">
+            <a:pPr algn="ctr">
               <a:spcAft>
-                <a:spcPts val="300"/>
+                <a:spcPts val="800"/>
               </a:spcAft>
             </a:pPr>
             <a:r>
-              <a:rPr sz="1500" b="1" i="0">
-                <a:solidFill>
-                  <a:srgbClr val="39D353"/>
-                </a:solidFill>
-                <a:latin typeface="Arial"/>
-              </a:rPr>
-              <a:t>OBSERVE</a:t>
-            </a:r>
-          </a:p>
-          <a:p>
-            <a:pPr algn="l"/>
-            <a:r>
-              <a:rPr sz="1050" b="0" i="0">
-                <a:solidFill>
-                  <a:srgbClr val="7E93B8"/>
-                </a:solidFill>
-                <a:latin typeface="Arial"/>
-              </a:rPr>
-              <a:t>note what actually changed</a:t>
-            </a:r>
-          </a:p>
-        </p:txBody>
-      </p:sp>
-      <p:sp>
-        <p:nvSpPr>
-          <p:cNvPr id="14" name="Oval 13"/>
+              <a:rPr sz="3300" b="1" i="0">
+                <a:solidFill>
+                  <a:srgbClr val="FFCF4D"/>
+                </a:solidFill>
+                <a:latin typeface="Arial"/>
+              </a:rPr>
+              <a:t>AT an apsis</a:t>
+            </a:r>
+          </a:p>
+          <a:p>
+            <a:pPr algn="ctr"/>
+            <a:r>
+              <a:rPr sz="1250" b="0" i="0">
+                <a:solidFill>
+                  <a:srgbClr val="CFE3FF"/>
+                </a:solidFill>
+                <a:latin typeface="Arial"/>
+              </a:rPr>
+              <a:t>radial motion is zero — one burn rounds it out</a:t>
+            </a:r>
+          </a:p>
+        </p:txBody>
+      </p:sp>
+      <p:sp>
+        <p:nvSpPr>
+          <p:cNvPr id="8" name="Rounded Rectangle 7"/>
           <p:cNvSpPr/>
           <p:nvPr/>
         </p:nvSpPr>
         <p:spPr>
           <a:xfrm>
-            <a:off x="690371" y="3278124"/>
-            <a:ext cx="118872" cy="118872"/>
-          </a:xfrm>
-          <a:prstGeom prst="ellipse">
-            <a:avLst/>
+            <a:off x="4335627" y="2148840"/>
+            <a:ext cx="3520440" cy="2148840"/>
+          </a:xfrm>
+          <a:prstGeom prst="roundRect">
+            <a:avLst>
+              <a:gd name="adj" fmla="val 7000"/>
+            </a:avLst>
           </a:prstGeom>
           <a:solidFill>
-            <a:srgbClr val="FFCF4D"/>
+            <a:srgbClr val="0A1830"/>
           </a:solidFill>
-          <a:ln>
-            <a:noFill/>
+          <a:ln w="12700">
+            <a:solidFill>
+              <a:srgbClr val="1E3A5F"/>
+            </a:solidFill>
           </a:ln>
           <a:effectLst/>
         </p:spPr>
@@ -7479,14 +9286,14 @@
       </p:sp>
       <p:sp>
         <p:nvSpPr>
-          <p:cNvPr id="15" name="TextBox 14"/>
+          <p:cNvPr id="9" name="TextBox 8"/>
           <p:cNvSpPr txBox="1"/>
           <p:nvPr/>
         </p:nvSpPr>
         <p:spPr>
           <a:xfrm>
-            <a:off x="1005840" y="3200400"/>
-            <a:ext cx="10607040" cy="685800"/>
+            <a:off x="4518507" y="2148840"/>
+            <a:ext cx="3154680" cy="2148840"/>
           </a:xfrm>
           <a:prstGeom prst="rect">
             <a:avLst/>
@@ -7494,43 +9301,63 @@
           <a:noFill/>
         </p:spPr>
         <p:txBody>
-          <a:bodyPr wrap="square" lIns="0" tIns="0" rIns="0" bIns="0">
+          <a:bodyPr wrap="square" lIns="0" tIns="0" rIns="0" bIns="0" anchor="ctr">
             <a:spAutoFit/>
           </a:bodyPr>
           <a:lstStyle/>
           <a:p>
-            <a:pPr algn="l"/>
-            <a:r>
-              <a:rPr sz="1350" b="0" i="0">
+            <a:pPr algn="ctr">
+              <a:spcAft>
+                <a:spcPts val="800"/>
+              </a:spcAft>
+            </a:pPr>
+            <a:r>
+              <a:rPr sz="3300" b="1" i="0">
+                <a:solidFill>
+                  <a:srgbClr val="FFCF4D"/>
+                </a:solidFill>
+                <a:latin typeface="Arial"/>
+              </a:rPr>
+              <a:t>anywhere else</a:t>
+            </a:r>
+          </a:p>
+          <a:p>
+            <a:pPr algn="ctr"/>
+            <a:r>
+              <a:rPr sz="1250" b="0" i="0">
                 <a:solidFill>
                   <a:srgbClr val="CFE3FF"/>
                 </a:solidFill>
                 <a:latin typeface="Arial"/>
               </a:rPr>
-              <a:t>PLAN: compute burn 1 and burn 2, log each Δv, and check the total against the tank.</a:t>
-            </a:r>
-          </a:p>
-        </p:txBody>
-      </p:sp>
-      <p:sp>
-        <p:nvSpPr>
-          <p:cNvPr id="16" name="Oval 15"/>
+              <a:t>the fix flips sign every half lap</a:t>
+            </a:r>
+          </a:p>
+        </p:txBody>
+      </p:sp>
+      <p:sp>
+        <p:nvSpPr>
+          <p:cNvPr id="10" name="Rounded Rectangle 9"/>
           <p:cNvSpPr/>
           <p:nvPr/>
         </p:nvSpPr>
         <p:spPr>
           <a:xfrm>
-            <a:off x="690371" y="3991356"/>
-            <a:ext cx="118872" cy="118872"/>
-          </a:xfrm>
-          <a:prstGeom prst="ellipse">
-            <a:avLst/>
+            <a:off x="8176107" y="2148840"/>
+            <a:ext cx="3520440" cy="2148840"/>
+          </a:xfrm>
+          <a:prstGeom prst="roundRect">
+            <a:avLst>
+              <a:gd name="adj" fmla="val 7000"/>
+            </a:avLst>
           </a:prstGeom>
           <a:solidFill>
-            <a:srgbClr val="FFCF4D"/>
+            <a:srgbClr val="0A1830"/>
           </a:solidFill>
-          <a:ln>
-            <a:noFill/>
+          <a:ln w="12700">
+            <a:solidFill>
+              <a:srgbClr val="1E3A5F"/>
+            </a:solidFill>
           </a:ln>
           <a:effectLst/>
         </p:spPr>
@@ -7559,14 +9386,65 @@
       </p:sp>
       <p:sp>
         <p:nvSpPr>
-          <p:cNvPr id="17" name="TextBox 16"/>
+          <p:cNvPr id="11" name="TextBox 10"/>
           <p:cNvSpPr txBox="1"/>
           <p:nvPr/>
         </p:nvSpPr>
         <p:spPr>
           <a:xfrm>
-            <a:off x="1005840" y="3913632"/>
-            <a:ext cx="10607040" cy="685800"/>
+            <a:off x="8358987" y="2148840"/>
+            <a:ext cx="3154680" cy="2148840"/>
+          </a:xfrm>
+          <a:prstGeom prst="rect">
+            <a:avLst/>
+          </a:prstGeom>
+          <a:noFill/>
+        </p:spPr>
+        <p:txBody>
+          <a:bodyPr wrap="square" lIns="0" tIns="0" rIns="0" bIns="0" anchor="ctr">
+            <a:spAutoFit/>
+          </a:bodyPr>
+          <a:lstStyle/>
+          <a:p>
+            <a:pPr algn="ctr">
+              <a:spcAft>
+                <a:spcPts val="800"/>
+              </a:spcAft>
+            </a:pPr>
+            <a:r>
+              <a:rPr sz="3300" b="1" i="0">
+                <a:solidFill>
+                  <a:srgbClr val="FFCF4D"/>
+                </a:solidFill>
+                <a:latin typeface="Arial"/>
+              </a:rPr>
+              <a:t>~40 m/s</a:t>
+            </a:r>
+          </a:p>
+          <a:p>
+            <a:pPr algn="ctr"/>
+            <a:r>
+              <a:rPr sz="1250" b="0" i="0">
+                <a:solidFill>
+                  <a:srgbClr val="CFE3FF"/>
+                </a:solidFill>
+                <a:latin typeface="Arial"/>
+              </a:rPr>
+              <a:t>what burn 3 costs when the brake was flown well</a:t>
+            </a:r>
+          </a:p>
+        </p:txBody>
+      </p:sp>
+      <p:sp>
+        <p:nvSpPr>
+          <p:cNvPr id="12" name="TextBox 11"/>
+          <p:cNvSpPr txBox="1"/>
+          <p:nvPr/>
+        </p:nvSpPr>
+        <p:spPr>
+          <a:xfrm>
+            <a:off x="548640" y="4709160"/>
+            <a:ext cx="11064240" cy="1280160"/>
           </a:xfrm>
           <a:prstGeom prst="rect">
             <a:avLst/>
@@ -7581,173 +9459,13 @@
           <a:p>
             <a:pPr algn="l"/>
             <a:r>
-              <a:rPr sz="1350" b="0" i="0">
+              <a:rPr sz="1350" b="0" i="1">
                 <a:solidFill>
                   <a:srgbClr val="CFE3FF"/>
                 </a:solidFill>
                 <a:latin typeface="Arial"/>
               </a:rPr>
-              <a:t>FLY the GEO mission: hit each BURN-NOW cue and hold the target box for a full orbit.</a:t>
-            </a:r>
-          </a:p>
-        </p:txBody>
-      </p:sp>
-      <p:sp>
-        <p:nvSpPr>
-          <p:cNvPr id="18" name="Oval 17"/>
-          <p:cNvSpPr/>
-          <p:nvPr/>
-        </p:nvSpPr>
-        <p:spPr>
-          <a:xfrm>
-            <a:off x="690371" y="4704588"/>
-            <a:ext cx="118872" cy="118872"/>
-          </a:xfrm>
-          <a:prstGeom prst="ellipse">
-            <a:avLst/>
-          </a:prstGeom>
-          <a:solidFill>
-            <a:srgbClr val="FFCF4D"/>
-          </a:solidFill>
-          <a:ln>
-            <a:noFill/>
-          </a:ln>
-          <a:effectLst/>
-        </p:spPr>
-        <p:style>
-          <a:lnRef idx="1">
-            <a:schemeClr val="accent1"/>
-          </a:lnRef>
-          <a:fillRef idx="3">
-            <a:schemeClr val="accent1"/>
-          </a:fillRef>
-          <a:effectRef idx="2">
-            <a:schemeClr val="accent1"/>
-          </a:effectRef>
-          <a:fontRef idx="minor">
-            <a:schemeClr val="lt1"/>
-          </a:fontRef>
-        </p:style>
-        <p:txBody>
-          <a:bodyPr rtlCol="0" anchor="ctr"/>
-          <a:lstStyle/>
-          <a:p>
-            <a:pPr algn="ctr"/>
-            <a:endParaRPr/>
-          </a:p>
-        </p:txBody>
-      </p:sp>
-      <p:sp>
-        <p:nvSpPr>
-          <p:cNvPr id="19" name="TextBox 18"/>
-          <p:cNvSpPr txBox="1"/>
-          <p:nvPr/>
-        </p:nvSpPr>
-        <p:spPr>
-          <a:xfrm>
-            <a:off x="1005840" y="4626864"/>
-            <a:ext cx="10607040" cy="685800"/>
-          </a:xfrm>
-          <a:prstGeom prst="rect">
-            <a:avLst/>
-          </a:prstGeom>
-          <a:noFill/>
-        </p:spPr>
-        <p:txBody>
-          <a:bodyPr wrap="square" lIns="0" tIns="0" rIns="0" bIns="0">
-            <a:spAutoFit/>
-          </a:bodyPr>
-          <a:lstStyle/>
-          <a:p>
-            <a:pPr algn="l"/>
-            <a:r>
-              <a:rPr sz="1350" b="0" i="0">
-                <a:solidFill>
-                  <a:srgbClr val="CFE3FF"/>
-                </a:solidFill>
-                <a:latin typeface="Arial"/>
-              </a:rPr>
-              <a:t>A clean GEO run unlocks the Moon: plan the ~120° lead, then TLI → 4-day coast → LOI.</a:t>
-            </a:r>
-          </a:p>
-        </p:txBody>
-      </p:sp>
-      <p:sp>
-        <p:nvSpPr>
-          <p:cNvPr id="20" name="Oval 19"/>
-          <p:cNvSpPr/>
-          <p:nvPr/>
-        </p:nvSpPr>
-        <p:spPr>
-          <a:xfrm>
-            <a:off x="690371" y="5417820"/>
-            <a:ext cx="118872" cy="118872"/>
-          </a:xfrm>
-          <a:prstGeom prst="ellipse">
-            <a:avLst/>
-          </a:prstGeom>
-          <a:solidFill>
-            <a:srgbClr val="FFCF4D"/>
-          </a:solidFill>
-          <a:ln>
-            <a:noFill/>
-          </a:ln>
-          <a:effectLst/>
-        </p:spPr>
-        <p:style>
-          <a:lnRef idx="1">
-            <a:schemeClr val="accent1"/>
-          </a:lnRef>
-          <a:fillRef idx="3">
-            <a:schemeClr val="accent1"/>
-          </a:fillRef>
-          <a:effectRef idx="2">
-            <a:schemeClr val="accent1"/>
-          </a:effectRef>
-          <a:fontRef idx="minor">
-            <a:schemeClr val="lt1"/>
-          </a:fontRef>
-        </p:style>
-        <p:txBody>
-          <a:bodyPr rtlCol="0" anchor="ctr"/>
-          <a:lstStyle/>
-          <a:p>
-            <a:pPr algn="ctr"/>
-            <a:endParaRPr/>
-          </a:p>
-        </p:txBody>
-      </p:sp>
-      <p:sp>
-        <p:nvSpPr>
-          <p:cNvPr id="21" name="TextBox 20"/>
-          <p:cNvSpPr txBox="1"/>
-          <p:nvPr/>
-        </p:nvSpPr>
-        <p:spPr>
-          <a:xfrm>
-            <a:off x="1005840" y="5340096"/>
-            <a:ext cx="10607040" cy="685800"/>
-          </a:xfrm>
-          <a:prstGeom prst="rect">
-            <a:avLst/>
-          </a:prstGeom>
-          <a:noFill/>
-        </p:spPr>
-        <p:txBody>
-          <a:bodyPr wrap="square" lIns="0" tIns="0" rIns="0" bIns="0">
-            <a:spAutoFit/>
-          </a:bodyPr>
-          <a:lstStyle/>
-          <a:p>
-            <a:pPr algn="l"/>
-            <a:r>
-              <a:rPr sz="1350" b="0" i="0">
-                <a:solidFill>
-                  <a:srgbClr val="CFE3FF"/>
-                </a:solidFill>
-                <a:latin typeface="Arial"/>
-              </a:rPr>
-              <a:t>Graduate: brake backwards at the Moon and hold lunar orbit.</a:t>
+              <a:t>Your high and low points are the only places where your velocity is already perpendicular to your radius. That is why the cockpit cues the lunar circularization at your next apsis and tells you to WAIT — and why the same rule governs trimming an egg-shaped orbit at GEO. Burn in between and you tilt the orbit instead of rounding it.</a:t>
             </a:r>
           </a:p>
         </p:txBody>
@@ -7760,7 +9478,7 @@
 </p:sld>
 </file>
 
-<file path=ppt/slides/slide8.xml><?xml version="1.0" encoding="utf-8"?>
+<file path=ppt/slides/slide9.xml><?xml version="1.0" encoding="utf-8"?>
 <p:sld xmlns:a="http://schemas.openxmlformats.org/drawingml/2006/main" xmlns:r="http://schemas.openxmlformats.org/officeDocument/2006/relationships" xmlns:p="http://schemas.openxmlformats.org/presentationml/2006/main">
   <p:cSld>
     <p:bg>
@@ -7787,20 +9505,90 @@
       </p:grpSpPr>
       <p:sp>
         <p:nvSpPr>
-          <p:cNvPr id="2" name="Oval 1"/>
+          <p:cNvPr id="2" name="TextBox 1"/>
+          <p:cNvSpPr txBox="1"/>
+          <p:nvPr/>
+        </p:nvSpPr>
+        <p:spPr>
+          <a:xfrm>
+            <a:off x="548640" y="384048"/>
+            <a:ext cx="8686800" cy="292608"/>
+          </a:xfrm>
+          <a:prstGeom prst="rect">
+            <a:avLst/>
+          </a:prstGeom>
+          <a:noFill/>
+        </p:spPr>
+        <p:txBody>
+          <a:bodyPr wrap="square" lIns="0" tIns="0" rIns="0" bIns="0">
+            <a:spAutoFit/>
+          </a:bodyPr>
+          <a:lstStyle/>
+          <a:p>
+            <a:pPr algn="l"/>
+            <a:r>
+              <a:rPr sz="1100" b="1" i="0">
+                <a:solidFill>
+                  <a:srgbClr val="FFCF4D"/>
+                </a:solidFill>
+                <a:latin typeface="Arial"/>
+              </a:rPr>
+              <a:t>MODULE 8 · ORBIT ACADEMY</a:t>
+            </a:r>
+          </a:p>
+        </p:txBody>
+      </p:sp>
+      <p:sp>
+        <p:nvSpPr>
+          <p:cNvPr id="3" name="TextBox 2"/>
+          <p:cNvSpPr txBox="1"/>
+          <p:nvPr/>
+        </p:nvSpPr>
+        <p:spPr>
+          <a:xfrm>
+            <a:off x="548640" y="676656"/>
+            <a:ext cx="10058400" cy="640080"/>
+          </a:xfrm>
+          <a:prstGeom prst="rect">
+            <a:avLst/>
+          </a:prstGeom>
+          <a:noFill/>
+        </p:spPr>
+        <p:txBody>
+          <a:bodyPr wrap="square" lIns="0" tIns="0" rIns="0" bIns="0">
+            <a:spAutoFit/>
+          </a:bodyPr>
+          <a:lstStyle/>
+          <a:p>
+            <a:pPr algn="l"/>
+            <a:r>
+              <a:rPr sz="2700" b="1" i="0">
+                <a:solidFill>
+                  <a:srgbClr val="5FD0FF"/>
+                </a:solidFill>
+                <a:latin typeface="Arial"/>
+              </a:rPr>
+              <a:t>The cockpit</a:t>
+            </a:r>
+          </a:p>
+        </p:txBody>
+      </p:sp>
+      <p:sp>
+        <p:nvSpPr>
+          <p:cNvPr id="4" name="Oval 3"/>
           <p:cNvSpPr/>
           <p:nvPr/>
         </p:nvSpPr>
         <p:spPr>
           <a:xfrm>
-            <a:off x="4953304" y="548640"/>
-            <a:ext cx="2286000" cy="822960"/>
+            <a:off x="10835640" y="484632"/>
+            <a:ext cx="914400" cy="347472"/>
           </a:xfrm>
           <a:prstGeom prst="ellipse">
             <a:avLst/>
           </a:prstGeom>
           <a:noFill/>
-          <a:ln w="15875">
+          <a:ln w="12700">
             <a:solidFill>
               <a:srgbClr val="2A4A74"/>
             </a:solidFill>
@@ -7832,14 +9620,14 @@
       </p:sp>
       <p:sp>
         <p:nvSpPr>
-          <p:cNvPr id="3" name="Oval 2"/>
+          <p:cNvPr id="5" name="Oval 4"/>
           <p:cNvSpPr/>
           <p:nvPr/>
         </p:nvSpPr>
         <p:spPr>
           <a:xfrm>
-            <a:off x="7189012" y="909828"/>
-            <a:ext cx="100584" cy="100584"/>
+            <a:off x="11708892" y="617219"/>
+            <a:ext cx="82296" cy="82296"/>
           </a:xfrm>
           <a:prstGeom prst="ellipse">
             <a:avLst/>
@@ -7877,23 +9665,25 @@
       </p:sp>
       <p:sp>
         <p:nvSpPr>
-          <p:cNvPr id="4" name="Oval 3"/>
+          <p:cNvPr id="6" name="Oval 5"/>
           <p:cNvSpPr/>
           <p:nvPr/>
         </p:nvSpPr>
         <p:spPr>
           <a:xfrm>
-            <a:off x="6055156" y="507492"/>
-            <a:ext cx="82296" cy="82296"/>
+            <a:off x="640080" y="1709928"/>
+            <a:ext cx="384048" cy="384048"/>
           </a:xfrm>
           <a:prstGeom prst="ellipse">
             <a:avLst/>
           </a:prstGeom>
           <a:solidFill>
-            <a:srgbClr val="39D353"/>
+            <a:srgbClr val="13294A"/>
           </a:solidFill>
-          <a:ln>
-            <a:noFill/>
+          <a:ln w="12700">
+            <a:solidFill>
+              <a:srgbClr val="FFCF4D"/>
+            </a:solidFill>
           </a:ln>
           <a:effectLst/>
         </p:spPr>
@@ -7912,24 +9702,32 @@
           </a:fontRef>
         </p:style>
         <p:txBody>
-          <a:bodyPr rtlCol="0" anchor="ctr"/>
+          <a:bodyPr wrap="none" lIns="0" tIns="0" rIns="0" bIns="0" rtlCol="0" anchor="ctr"/>
           <a:lstStyle/>
           <a:p>
             <a:pPr algn="ctr"/>
-            <a:endParaRPr/>
-          </a:p>
-        </p:txBody>
-      </p:sp>
-      <p:sp>
-        <p:nvSpPr>
-          <p:cNvPr id="5" name="TextBox 4"/>
+            <a:r>
+              <a:rPr sz="1300" b="1" i="0">
+                <a:solidFill>
+                  <a:srgbClr val="FFCF4D"/>
+                </a:solidFill>
+                <a:latin typeface="Arial"/>
+              </a:rPr>
+              <a:t>1</a:t>
+            </a:r>
+          </a:p>
+        </p:txBody>
+      </p:sp>
+      <p:sp>
+        <p:nvSpPr>
+          <p:cNvPr id="7" name="TextBox 6"/>
           <p:cNvSpPr txBox="1"/>
           <p:nvPr/>
         </p:nvSpPr>
         <p:spPr>
           <a:xfrm>
-            <a:off x="1097280" y="1737360"/>
-            <a:ext cx="9966960" cy="365760"/>
+            <a:off x="1234440" y="1691640"/>
+            <a:ext cx="10332720" cy="960120"/>
           </a:xfrm>
           <a:prstGeom prst="rect">
             <a:avLst/>
@@ -7942,29 +9740,120 @@
           </a:bodyPr>
           <a:lstStyle/>
           <a:p>
+            <a:pPr algn="l"/>
+            <a:r>
+              <a:rPr sz="1400" b="1" i="0" dirty="0">
+                <a:solidFill>
+                  <a:srgbClr val="EAF4FF"/>
+                </a:solidFill>
+                <a:latin typeface="Arial"/>
+              </a:rPr>
+              <a:t>TRAIN mode</a:t>
+            </a:r>
+            <a:r>
+              <a:rPr sz="1300" b="0" i="0" dirty="0">
+                <a:solidFill>
+                  <a:srgbClr val="7E93B8"/>
+                </a:solidFill>
+                <a:latin typeface="Arial"/>
+              </a:rPr>
+              <a:t>  —  </a:t>
+            </a:r>
+            <a:r>
+              <a:rPr sz="1250" b="0" i="0" dirty="0">
+                <a:solidFill>
+                  <a:srgbClr val="CFE3FF"/>
+                </a:solidFill>
+                <a:latin typeface="Arial"/>
+              </a:rPr>
+              <a:t>free flight, unlimited fuel, nothing scored: build the intuition first</a:t>
+            </a:r>
+            <a:r>
+              <a:rPr sz="1250" b="0" i="0" dirty="0" err="1">
+                <a:solidFill>
+                  <a:srgbClr val="CFE3FF"/>
+                </a:solidFill>
+                <a:latin typeface="Arial"/>
+              </a:rPr>
+              <a:t/>
+            </a:r>
+            <a:r>
+              <a:rPr sz="1250" b="0" i="0" dirty="0">
+                <a:solidFill>
+                  <a:srgbClr val="CFE3FF"/>
+                </a:solidFill>
+                <a:latin typeface="Arial"/>
+              </a:rPr>
+              <a:t/>
+            </a:r>
+          </a:p>
+        </p:txBody>
+      </p:sp>
+      <p:sp>
+        <p:nvSpPr>
+          <p:cNvPr id="8" name="Oval 7"/>
+          <p:cNvSpPr/>
+          <p:nvPr/>
+        </p:nvSpPr>
+        <p:spPr>
+          <a:xfrm>
+            <a:off x="640080" y="2670048"/>
+            <a:ext cx="384048" cy="384048"/>
+          </a:xfrm>
+          <a:prstGeom prst="ellipse">
+            <a:avLst/>
+          </a:prstGeom>
+          <a:solidFill>
+            <a:srgbClr val="13294A"/>
+          </a:solidFill>
+          <a:ln w="12700">
+            <a:solidFill>
+              <a:srgbClr val="FFCF4D"/>
+            </a:solidFill>
+          </a:ln>
+          <a:effectLst/>
+        </p:spPr>
+        <p:style>
+          <a:lnRef idx="1">
+            <a:schemeClr val="accent1"/>
+          </a:lnRef>
+          <a:fillRef idx="3">
+            <a:schemeClr val="accent1"/>
+          </a:fillRef>
+          <a:effectRef idx="2">
+            <a:schemeClr val="accent1"/>
+          </a:effectRef>
+          <a:fontRef idx="minor">
+            <a:schemeClr val="lt1"/>
+          </a:fontRef>
+        </p:style>
+        <p:txBody>
+          <a:bodyPr wrap="none" lIns="0" tIns="0" rIns="0" bIns="0" rtlCol="0" anchor="ctr"/>
+          <a:lstStyle/>
+          <a:p>
             <a:pPr algn="ctr"/>
             <a:r>
-              <a:rPr sz="1250" b="1" i="0">
+              <a:rPr sz="1300" b="1" i="0">
                 <a:solidFill>
                   <a:srgbClr val="FFCF4D"/>
                 </a:solidFill>
                 <a:latin typeface="Arial"/>
               </a:rPr>
-              <a:t>THE ONE THING TO REMEMBER</a:t>
-            </a:r>
-          </a:p>
-        </p:txBody>
-      </p:sp>
-      <p:sp>
-        <p:nvSpPr>
-          <p:cNvPr id="6" name="TextBox 5"/>
+              <a:t>2</a:t>
+            </a:r>
+          </a:p>
+        </p:txBody>
+      </p:sp>
+      <p:sp>
+        <p:nvSpPr>
+          <p:cNvPr id="9" name="TextBox 8"/>
           <p:cNvSpPr txBox="1"/>
           <p:nvPr/>
         </p:nvSpPr>
         <p:spPr>
           <a:xfrm>
-            <a:off x="1234440" y="2743200"/>
-            <a:ext cx="9692640" cy="2011680"/>
+            <a:off x="1234440" y="2651760"/>
+            <a:ext cx="10332720" cy="960120"/>
           </a:xfrm>
           <a:prstGeom prst="rect">
             <a:avLst/>
@@ -7977,29 +9866,102 @@
           </a:bodyPr>
           <a:lstStyle/>
           <a:p>
+            <a:pPr algn="l"/>
+            <a:r>
+              <a:rPr sz="1400" b="1" i="0">
+                <a:solidFill>
+                  <a:srgbClr val="EAF4FF"/>
+                </a:solidFill>
+                <a:latin typeface="Arial"/>
+              </a:rPr>
+              <a:t>PLAN mode</a:t>
+            </a:r>
+            <a:r>
+              <a:rPr sz="1300" b="0" i="0">
+                <a:solidFill>
+                  <a:srgbClr val="7E93B8"/>
+                </a:solidFill>
+                <a:latin typeface="Arial"/>
+              </a:rPr>
+              <a:t>  —  </a:t>
+            </a:r>
+            <a:r>
+              <a:rPr sz="1250" b="0" i="0">
+                <a:solidFill>
+                  <a:srgbClr val="CFE3FF"/>
+                </a:solidFill>
+                <a:latin typeface="Arial"/>
+              </a:rPr>
+              <a:t>dial each burn's </a:t>
+            </a:r>
+          </a:p>
+        </p:txBody>
+      </p:sp>
+      <p:sp>
+        <p:nvSpPr>
+          <p:cNvPr id="10" name="Oval 9"/>
+          <p:cNvSpPr/>
+          <p:nvPr/>
+        </p:nvSpPr>
+        <p:spPr>
+          <a:xfrm>
+            <a:off x="640080" y="3630168"/>
+            <a:ext cx="384048" cy="384048"/>
+          </a:xfrm>
+          <a:prstGeom prst="ellipse">
+            <a:avLst/>
+          </a:prstGeom>
+          <a:solidFill>
+            <a:srgbClr val="13294A"/>
+          </a:solidFill>
+          <a:ln w="12700">
+            <a:solidFill>
+              <a:srgbClr val="FFCF4D"/>
+            </a:solidFill>
+          </a:ln>
+          <a:effectLst/>
+        </p:spPr>
+        <p:style>
+          <a:lnRef idx="1">
+            <a:schemeClr val="accent1"/>
+          </a:lnRef>
+          <a:fillRef idx="3">
+            <a:schemeClr val="accent1"/>
+          </a:fillRef>
+          <a:effectRef idx="2">
+            <a:schemeClr val="accent1"/>
+          </a:effectRef>
+          <a:fontRef idx="minor">
+            <a:schemeClr val="lt1"/>
+          </a:fontRef>
+        </p:style>
+        <p:txBody>
+          <a:bodyPr wrap="none" lIns="0" tIns="0" rIns="0" bIns="0" rtlCol="0" anchor="ctr"/>
+          <a:lstStyle/>
+          <a:p>
             <a:pPr algn="ctr"/>
             <a:r>
-              <a:rPr sz="2900" b="1" i="0">
-                <a:solidFill>
-                  <a:srgbClr val="5FD0FF"/>
-                </a:solidFill>
-                <a:latin typeface="Arial"/>
-              </a:rPr>
-              <a:t>Plan the Δv, fly the plan — and at the Moon, brake backwards.</a:t>
-            </a:r>
-          </a:p>
-        </p:txBody>
-      </p:sp>
-      <p:sp>
-        <p:nvSpPr>
-          <p:cNvPr id="7" name="TextBox 6"/>
+              <a:rPr sz="1300" b="1" i="0">
+                <a:solidFill>
+                  <a:srgbClr val="FFCF4D"/>
+                </a:solidFill>
+                <a:latin typeface="Arial"/>
+              </a:rPr>
+              <a:t>3</a:t>
+            </a:r>
+          </a:p>
+        </p:txBody>
+      </p:sp>
+      <p:sp>
+        <p:nvSpPr>
+          <p:cNvPr id="11" name="TextBox 10"/>
           <p:cNvSpPr txBox="1"/>
           <p:nvPr/>
         </p:nvSpPr>
         <p:spPr>
           <a:xfrm>
-            <a:off x="1097280" y="5212080"/>
-            <a:ext cx="9966960" cy="457200"/>
+            <a:off x="1234440" y="3611880"/>
+            <a:ext cx="10332720" cy="960120"/>
           </a:xfrm>
           <a:prstGeom prst="rect">
             <a:avLst/>
@@ -8012,15 +9974,141 @@
           </a:bodyPr>
           <a:lstStyle/>
           <a:p>
+            <a:pPr algn="l"/>
+            <a:r>
+              <a:rPr sz="1400" b="1" i="0">
+                <a:solidFill>
+                  <a:srgbClr val="EAF4FF"/>
+                </a:solidFill>
+                <a:latin typeface="Arial"/>
+              </a:rPr>
+              <a:t>FLY mode</a:t>
+            </a:r>
+            <a:r>
+              <a:rPr sz="1300" b="0" i="0">
+                <a:solidFill>
+                  <a:srgbClr val="7E93B8"/>
+                </a:solidFill>
+                <a:latin typeface="Arial"/>
+              </a:rPr>
+              <a:t>  —  </a:t>
+            </a:r>
+            <a:r>
+              <a:rPr sz="1250" b="0" i="0">
+                <a:solidFill>
+                  <a:srgbClr val="CFE3FF"/>
+                </a:solidFill>
+                <a:latin typeface="Arial"/>
+              </a:rPr>
+              <a:t>the scored mission: countdown, BURN NOW cue, or 🤖 AUTO FLY to watch it flown</a:t>
+            </a:r>
+          </a:p>
+        </p:txBody>
+      </p:sp>
+      <p:sp>
+        <p:nvSpPr>
+          <p:cNvPr id="12" name="Oval 11"/>
+          <p:cNvSpPr/>
+          <p:nvPr/>
+        </p:nvSpPr>
+        <p:spPr>
+          <a:xfrm>
+            <a:off x="640080" y="4590288"/>
+            <a:ext cx="384048" cy="384048"/>
+          </a:xfrm>
+          <a:prstGeom prst="ellipse">
+            <a:avLst/>
+          </a:prstGeom>
+          <a:solidFill>
+            <a:srgbClr val="13294A"/>
+          </a:solidFill>
+          <a:ln w="12700">
+            <a:solidFill>
+              <a:srgbClr val="FFCF4D"/>
+            </a:solidFill>
+          </a:ln>
+          <a:effectLst/>
+        </p:spPr>
+        <p:style>
+          <a:lnRef idx="1">
+            <a:schemeClr val="accent1"/>
+          </a:lnRef>
+          <a:fillRef idx="3">
+            <a:schemeClr val="accent1"/>
+          </a:fillRef>
+          <a:effectRef idx="2">
+            <a:schemeClr val="accent1"/>
+          </a:effectRef>
+          <a:fontRef idx="minor">
+            <a:schemeClr val="lt1"/>
+          </a:fontRef>
+        </p:style>
+        <p:txBody>
+          <a:bodyPr wrap="none" lIns="0" tIns="0" rIns="0" bIns="0" rtlCol="0" anchor="ctr"/>
+          <a:lstStyle/>
+          <a:p>
             <a:pPr algn="ctr"/>
             <a:r>
-              <a:rPr sz="1500" b="1" i="0">
-                <a:solidFill>
-                  <a:srgbClr val="39D353"/>
-                </a:solidFill>
-                <a:latin typeface="Arial"/>
-              </a:rPr>
-              <a:t>Open Worksheet 8 and keep the simulator beside it.</a:t>
+              <a:rPr sz="1300" b="1" i="0">
+                <a:solidFill>
+                  <a:srgbClr val="FFCF4D"/>
+                </a:solidFill>
+                <a:latin typeface="Arial"/>
+              </a:rPr>
+              <a:t>4</a:t>
+            </a:r>
+          </a:p>
+        </p:txBody>
+      </p:sp>
+      <p:sp>
+        <p:nvSpPr>
+          <p:cNvPr id="13" name="TextBox 12"/>
+          <p:cNvSpPr txBox="1"/>
+          <p:nvPr/>
+        </p:nvSpPr>
+        <p:spPr>
+          <a:xfrm>
+            <a:off x="1234440" y="4572000"/>
+            <a:ext cx="10332720" cy="960120"/>
+          </a:xfrm>
+          <a:prstGeom prst="rect">
+            <a:avLst/>
+          </a:prstGeom>
+          <a:noFill/>
+        </p:spPr>
+        <p:txBody>
+          <a:bodyPr wrap="square" lIns="0" tIns="0" rIns="0" bIns="0">
+            <a:spAutoFit/>
+          </a:bodyPr>
+          <a:lstStyle/>
+          <a:p>
+            <a:pPr algn="l"/>
+            <a:r>
+              <a:rPr sz="1400" b="1" i="0">
+                <a:solidFill>
+                  <a:srgbClr val="EAF4FF"/>
+                </a:solidFill>
+                <a:latin typeface="Arial"/>
+              </a:rPr>
+              <a:t>RENDEZVOUS DIRECTOR</a:t>
+            </a:r>
+            <a:r>
+              <a:rPr sz="1300" b="0" i="0">
+                <a:solidFill>
+                  <a:srgbClr val="7E93B8"/>
+                </a:solidFill>
+                <a:latin typeface="Arial"/>
+              </a:rPr>
+              <a:t>  —  </a:t>
+            </a:r>
+            <a:r>
+              <a:rPr sz="1250" b="0" i="0">
+                <a:solidFill>
+                  <a:srgbClr val="CFE3FF"/>
+                </a:solidFill>
+                <a:latin typeface="Arial"/>
+              </a:rPr>
+              <a:t>range, closing rate, drift — what to hold, when, and why</a:t>
             </a:r>
           </a:p>
         </p:txBody>
